--- a/deck/CoreWeave信用風險與融資需求_20261016.pptx
+++ b/deck/CoreWeave信用風險與融資需求_20261016.pptx
@@ -29,6 +29,8 @@
     <p:sldId id="277" r:id="rId30"/>
     <p:sldId id="278" r:id="rId31"/>
     <p:sldId id="279" r:id="rId32"/>
+    <p:sldId id="280" r:id="rId33"/>
+    <p:sldId id="281" r:id="rId34"/>
   </p:sldIdLst>
   <p:sldSz cx="12192000" cy="6858000"/>
   <p:notesSz cx="6858000" cy="9144000"/>
@@ -143,7 +145,7 @@
     <c:plotArea>
       <c:barChart>
         <c:barDir val="col"/>
-        <c:grouping val="clustered"/>
+        <c:grouping val="stacked"/>
         <c:ser>
           <c:idx val="0"/>
           <c:order val="0"/>
@@ -153,7 +155,7 @@
               <c:strCache>
                 <c:ptCount val="1"/>
                 <c:pt idx="0">
-                  <c:v>5Y CDS</c:v>
+                  <c:v>擔保貸款</c:v>
                 </c:pt>
               </c:strCache>
             </c:strRef>
@@ -165,191 +167,144 @@
           </c:spPr>
           <c:cat>
             <c:strRef>
-              <c:f>Sheet1!$A$2:$A$4</c:f>
+              <c:f>Sheet1!$A$2:$A$8</c:f>
               <c:strCache>
-                <c:ptCount val="3"/>
+                <c:ptCount val="7"/>
                 <c:pt idx="0">
-                  <c:v>10/6</c:v>
+                  <c:v>2028</c:v>
                 </c:pt>
                 <c:pt idx="1">
-                  <c:v>10/9</c:v>
+                  <c:v>2029</c:v>
                 </c:pt>
                 <c:pt idx="2">
-                  <c:v>10/15</c:v>
+                  <c:v>2030</c:v>
+                </c:pt>
+                <c:pt idx="3">
+                  <c:v>2031</c:v>
+                </c:pt>
+                <c:pt idx="4">
+                  <c:v>2032</c:v>
+                </c:pt>
+                <c:pt idx="5">
+                  <c:v>2033</c:v>
+                </c:pt>
+                <c:pt idx="6">
+                  <c:v>未揭露</c:v>
                 </c:pt>
               </c:strCache>
             </c:strRef>
           </c:cat>
           <c:val>
             <c:numRef>
-              <c:f>Sheet1!$B$2:$B$4</c:f>
+              <c:f>Sheet1!$B$2:$B$8</c:f>
               <c:numCache>
                 <c:formatCode>General</c:formatCode>
-                <c:ptCount val="3"/>
+                <c:ptCount val="7"/>
                 <c:pt idx="0">
-                  <c:v>368</c:v>
+                  <c:v>15.0</c:v>
                 </c:pt>
                 <c:pt idx="1">
-                  <c:v>643</c:v>
+                  <c:v>12.2</c:v>
                 </c:pt>
                 <c:pt idx="2">
-                  <c:v>1194.5</c:v>
+                  <c:v>79.1</c:v>
+                </c:pt>
+                <c:pt idx="3">
+                  <c:v>23.0</c:v>
+                </c:pt>
+                <c:pt idx="4">
+                  <c:v>29.0</c:v>
+                </c:pt>
+                <c:pt idx="5">
+                  <c:v>0</c:v>
+                </c:pt>
+                <c:pt idx="6">
+                  <c:v>75.0</c:v>
                 </c:pt>
               </c:numCache>
             </c:numRef>
           </c:val>
         </c:ser>
-        <c:axId val="-2068027336"/>
-        <c:axId val="-2113994440"/>
-      </c:barChart>
-      <c:catAx>
-        <c:axId val="-2068027336"/>
-        <c:scaling>
-          <c:orientation val="minMax"/>
-        </c:scaling>
-        <c:delete val="0"/>
-        <c:axPos val="b"/>
-        <c:majorTickMark val="out"/>
-        <c:minorTickMark val="none"/>
-        <c:tickLblPos val="nextTo"/>
-        <c:crossAx val="-2113994440"/>
-        <c:crosses val="autoZero"/>
-        <c:auto val="1"/>
-        <c:lblAlgn val="ctr"/>
-        <c:lblOffset val="100"/>
-        <c:noMultiLvlLbl val="0"/>
-      </c:catAx>
-      <c:valAx>
-        <c:axId val="-2113994440"/>
-        <c:scaling/>
-        <c:delete val="0"/>
-        <c:axPos val="l"/>
-        <c:majorGridlines>
-          <c:spPr>
-            <a:ln>
-              <a:solidFill>
-                <a:srgbClr val="D9D9D9"/>
-              </a:solidFill>
-            </a:ln>
-          </c:spPr>
-        </c:majorGridlines>
-        <c:title>
-          <c:tx>
-            <c:rich>
-              <a:bodyPr/>
-              <a:lstStyle/>
-              <a:p>
-                <a:r>
-                  <a:t>bp</a:t>
-                </a:r>
-              </a:p>
-            </c:rich>
-          </c:tx>
-          <c:layout/>
-          <c:overlay val="0"/>
-        </c:title>
-        <c:numFmt formatCode="#,##0" sourceLinked="0"/>
-        <c:majorTickMark val="out"/>
-        <c:minorTickMark val="none"/>
-        <c:tickLblPos val="nextTo"/>
-        <c:crossAx val="-2068027336"/>
-        <c:crosses val="autoZero"/>
-      </c:valAx>
-    </c:plotArea>
-    <c:dispBlanksAs val="gap"/>
-  </c:chart>
-  <c:txPr>
-    <a:bodyPr/>
-    <a:lstStyle/>
-    <a:p>
-      <a:pPr>
-        <a:defRPr sz="1100"/>
-      </a:pPr>
-      <a:endParaRPr lang="en-US"/>
-    </a:p>
-  </c:txPr>
-  <c:externalData r:id="rId1">
-    <c:autoUpdate val="0"/>
-  </c:externalData>
-</c:chartSpace>
-</file>
-
-<file path=ppt/charts/chart2.xml><?xml version="1.0" encoding="utf-8"?>
-<c:chartSpace xmlns:c="http://schemas.openxmlformats.org/drawingml/2006/chart" xmlns:a="http://schemas.openxmlformats.org/drawingml/2006/main" xmlns:r="http://schemas.openxmlformats.org/officeDocument/2006/relationships">
-  <c:date1904 val="0"/>
-  <c:chart>
-    <c:autoTitleDeleted val="1"/>
-    <c:plotArea>
-      <c:barChart>
-        <c:barDir val="col"/>
-        <c:grouping val="clustered"/>
         <c:ser>
-          <c:idx val="0"/>
-          <c:order val="0"/>
+          <c:idx val="1"/>
+          <c:order val="1"/>
           <c:tx>
             <c:strRef>
-              <c:f>Sheet1!$B$1</c:f>
+              <c:f>Sheet1!$C$1</c:f>
               <c:strCache>
                 <c:ptCount val="1"/>
                 <c:pt idx="0">
-                  <c:v>到期本金</c:v>
+                  <c:v>無擔保債與可轉債</c:v>
                 </c:pt>
               </c:strCache>
             </c:strRef>
           </c:tx>
           <c:spPr>
             <a:solidFill>
-              <a:srgbClr val="0065B2"/>
+              <a:srgbClr val="E83F0A"/>
             </a:solidFill>
           </c:spPr>
           <c:cat>
             <c:strRef>
-              <c:f>Sheet1!$A$2:$A$6</c:f>
+              <c:f>Sheet1!$A$2:$A$8</c:f>
               <c:strCache>
-                <c:ptCount val="5"/>
+                <c:ptCount val="7"/>
                 <c:pt idx="0">
-                  <c:v>2026 下半年</c:v>
+                  <c:v>2028</c:v>
                 </c:pt>
                 <c:pt idx="1">
-                  <c:v>2027</c:v>
+                  <c:v>2029</c:v>
                 </c:pt>
                 <c:pt idx="2">
-                  <c:v>2028–29</c:v>
+                  <c:v>2030</c:v>
                 </c:pt>
                 <c:pt idx="3">
-                  <c:v>2030</c:v>
+                  <c:v>2031</c:v>
                 </c:pt>
                 <c:pt idx="4">
-                  <c:v>2031 以後</c:v>
+                  <c:v>2032</c:v>
+                </c:pt>
+                <c:pt idx="5">
+                  <c:v>2033</c:v>
+                </c:pt>
+                <c:pt idx="6">
+                  <c:v>未揭露</c:v>
                 </c:pt>
               </c:strCache>
             </c:strRef>
           </c:cat>
           <c:val>
             <c:numRef>
-              <c:f>Sheet1!$B$2:$B$6</c:f>
+              <c:f>Sheet1!$C$2:$C$8</c:f>
               <c:numCache>
                 <c:formatCode>General</c:formatCode>
-                <c:ptCount val="5"/>
+                <c:ptCount val="7"/>
                 <c:pt idx="0">
-                  <c:v>44</c:v>
+                  <c:v>0</c:v>
                 </c:pt>
                 <c:pt idx="1">
-                  <c:v>62</c:v>
+                  <c:v>0</c:v>
                 </c:pt>
                 <c:pt idx="2">
-                  <c:v>69</c:v>
+                  <c:v>20.1</c:v>
                 </c:pt>
                 <c:pt idx="3">
-                  <c:v>32</c:v>
+                  <c:v>70.9</c:v>
                 </c:pt>
                 <c:pt idx="4">
-                  <c:v>149</c:v>
+                  <c:v>74.8</c:v>
+                </c:pt>
+                <c:pt idx="5">
+                  <c:v>42.0</c:v>
+                </c:pt>
+                <c:pt idx="6">
+                  <c:v>0</c:v>
                 </c:pt>
               </c:numCache>
             </c:numRef>
           </c:val>
         </c:ser>
+        <c:overlap val="100"/>
         <c:axId val="-2068027336"/>
         <c:axId val="-2113994440"/>
       </c:barChart>
@@ -392,6 +347,10 @@
         <c:crosses val="autoZero"/>
       </c:valAx>
     </c:plotArea>
+    <c:legend>
+      <c:legendPos val="b"/>
+      <c:overlay val="0"/>
+    </c:legend>
     <c:dispBlanksAs val="gap"/>
   </c:chart>
   <c:txPr>
@@ -410,7 +369,7 @@
 </c:chartSpace>
 </file>
 
-<file path=ppt/charts/chart3.xml><?xml version="1.0" encoding="utf-8"?>
+<file path=ppt/charts/chart2.xml><?xml version="1.0" encoding="utf-8"?>
 <c:chartSpace xmlns:c="http://schemas.openxmlformats.org/drawingml/2006/chart" xmlns:a="http://schemas.openxmlformats.org/drawingml/2006/main" xmlns:r="http://schemas.openxmlformats.org/officeDocument/2006/relationships">
   <c:date1904 val="0"/>
   <c:chart>
@@ -508,10 +467,10 @@
                 <c:formatCode>General</c:formatCode>
                 <c:ptCount val="2"/>
                 <c:pt idx="0">
-                  <c:v>22.5</c:v>
+                  <c:v>25.9</c:v>
                 </c:pt>
                 <c:pt idx="1">
-                  <c:v>72</c:v>
+                  <c:v>82</c:v>
                 </c:pt>
               </c:numCache>
             </c:numRef>
@@ -560,13 +519,196 @@
                   <c:v>37.5</c:v>
                 </c:pt>
                 <c:pt idx="1">
-                  <c:v>63</c:v>
+                  <c:v>62.3</c:v>
                 </c:pt>
               </c:numCache>
             </c:numRef>
           </c:val>
         </c:ser>
         <c:overlap val="100"/>
+        <c:axId val="-2068027336"/>
+        <c:axId val="-2113994440"/>
+      </c:barChart>
+      <c:catAx>
+        <c:axId val="-2068027336"/>
+        <c:scaling>
+          <c:orientation val="minMax"/>
+        </c:scaling>
+        <c:delete val="0"/>
+        <c:axPos val="b"/>
+        <c:majorTickMark val="out"/>
+        <c:minorTickMark val="none"/>
+        <c:tickLblPos val="nextTo"/>
+        <c:crossAx val="-2113994440"/>
+        <c:crosses val="autoZero"/>
+        <c:auto val="1"/>
+        <c:lblAlgn val="ctr"/>
+        <c:lblOffset val="100"/>
+        <c:noMultiLvlLbl val="0"/>
+      </c:catAx>
+      <c:valAx>
+        <c:axId val="-2113994440"/>
+        <c:scaling/>
+        <c:delete val="0"/>
+        <c:axPos val="l"/>
+        <c:majorGridlines>
+          <c:spPr>
+            <a:ln>
+              <a:solidFill>
+                <a:srgbClr val="D9D9D9"/>
+              </a:solidFill>
+            </a:ln>
+          </c:spPr>
+        </c:majorGridlines>
+        <c:numFmt formatCode="0" sourceLinked="0"/>
+        <c:majorTickMark val="out"/>
+        <c:minorTickMark val="none"/>
+        <c:tickLblPos val="nextTo"/>
+        <c:crossAx val="-2068027336"/>
+        <c:crosses val="autoZero"/>
+      </c:valAx>
+    </c:plotArea>
+    <c:legend>
+      <c:legendPos val="b"/>
+      <c:overlay val="0"/>
+    </c:legend>
+    <c:dispBlanksAs val="gap"/>
+  </c:chart>
+  <c:txPr>
+    <a:bodyPr/>
+    <a:lstStyle/>
+    <a:p>
+      <a:pPr>
+        <a:defRPr sz="1100"/>
+      </a:pPr>
+      <a:endParaRPr lang="en-US"/>
+    </a:p>
+  </c:txPr>
+  <c:externalData r:id="rId1">
+    <c:autoUpdate val="0"/>
+  </c:externalData>
+</c:chartSpace>
+</file>
+
+<file path=ppt/charts/chart3.xml><?xml version="1.0" encoding="utf-8"?>
+<c:chartSpace xmlns:c="http://schemas.openxmlformats.org/drawingml/2006/chart" xmlns:a="http://schemas.openxmlformats.org/drawingml/2006/main" xmlns:r="http://schemas.openxmlformats.org/officeDocument/2006/relationships">
+  <c:date1904 val="0"/>
+  <c:chart>
+    <c:autoTitleDeleted val="1"/>
+    <c:plotArea>
+      <c:barChart>
+        <c:barDir val="col"/>
+        <c:grouping val="clustered"/>
+        <c:ser>
+          <c:idx val="0"/>
+          <c:order val="0"/>
+          <c:tx>
+            <c:strRef>
+              <c:f>Sheet1!$B$1</c:f>
+              <c:strCache>
+                <c:ptCount val="1"/>
+                <c:pt idx="0">
+                  <c:v>調整後營業利益</c:v>
+                </c:pt>
+              </c:strCache>
+            </c:strRef>
+          </c:tx>
+          <c:spPr>
+            <a:solidFill>
+              <a:srgbClr val="0065B2"/>
+            </a:solidFill>
+          </c:spPr>
+          <c:cat>
+            <c:strRef>
+              <c:f>Sheet1!$A$2:$A$4</c:f>
+              <c:strCache>
+                <c:ptCount val="3"/>
+                <c:pt idx="0">
+                  <c:v>2025A</c:v>
+                </c:pt>
+                <c:pt idx="1">
+                  <c:v>2026E</c:v>
+                </c:pt>
+                <c:pt idx="2">
+                  <c:v>2027E</c:v>
+                </c:pt>
+              </c:strCache>
+            </c:strRef>
+          </c:cat>
+          <c:val>
+            <c:numRef>
+              <c:f>Sheet1!$B$2:$B$4</c:f>
+              <c:numCache>
+                <c:formatCode>General</c:formatCode>
+                <c:ptCount val="3"/>
+                <c:pt idx="0">
+                  <c:v>6.7</c:v>
+                </c:pt>
+                <c:pt idx="1">
+                  <c:v>10.6</c:v>
+                </c:pt>
+                <c:pt idx="2">
+                  <c:v>41.2</c:v>
+                </c:pt>
+              </c:numCache>
+            </c:numRef>
+          </c:val>
+        </c:ser>
+        <c:ser>
+          <c:idx val="1"/>
+          <c:order val="1"/>
+          <c:tx>
+            <c:strRef>
+              <c:f>Sheet1!$C$1</c:f>
+              <c:strCache>
+                <c:ptCount val="1"/>
+                <c:pt idx="0">
+                  <c:v>利息費用</c:v>
+                </c:pt>
+              </c:strCache>
+            </c:strRef>
+          </c:tx>
+          <c:spPr>
+            <a:solidFill>
+              <a:srgbClr val="E83F0A"/>
+            </a:solidFill>
+          </c:spPr>
+          <c:cat>
+            <c:strRef>
+              <c:f>Sheet1!$A$2:$A$4</c:f>
+              <c:strCache>
+                <c:ptCount val="3"/>
+                <c:pt idx="0">
+                  <c:v>2025A</c:v>
+                </c:pt>
+                <c:pt idx="1">
+                  <c:v>2026E</c:v>
+                </c:pt>
+                <c:pt idx="2">
+                  <c:v>2027E</c:v>
+                </c:pt>
+              </c:strCache>
+            </c:strRef>
+          </c:cat>
+          <c:val>
+            <c:numRef>
+              <c:f>Sheet1!$C$2:$C$4</c:f>
+              <c:numCache>
+                <c:formatCode>General</c:formatCode>
+                <c:ptCount val="3"/>
+                <c:pt idx="0">
+                  <c:v>12.3</c:v>
+                </c:pt>
+                <c:pt idx="1">
+                  <c:v>30.4</c:v>
+                </c:pt>
+                <c:pt idx="2">
+                  <c:v>52.7</c:v>
+                </c:pt>
+              </c:numCache>
+            </c:numRef>
+          </c:val>
+        </c:ser>
         <c:axId val="-2068027336"/>
         <c:axId val="-2113994440"/>
       </c:barChart>
@@ -649,7 +791,7 @@
               <c:strCache>
                 <c:ptCount val="1"/>
                 <c:pt idx="0">
-                  <c:v>利息費用</c:v>
+                  <c:v>營運現金流</c:v>
                 </c:pt>
               </c:strCache>
             </c:strRef>
@@ -661,29 +803,145 @@
           </c:spPr>
           <c:cat>
             <c:strRef>
-              <c:f>Sheet1!$A$2:$A$3</c:f>
+              <c:f>Sheet1!$A$2:$A$4</c:f>
               <c:strCache>
-                <c:ptCount val="2"/>
+                <c:ptCount val="3"/>
                 <c:pt idx="0">
-                  <c:v>Q2 實際</c:v>
+                  <c:v>2025A</c:v>
                 </c:pt>
                 <c:pt idx="1">
-                  <c:v>Q3 指引中值</c:v>
+                  <c:v>2026E</c:v>
+                </c:pt>
+                <c:pt idx="2">
+                  <c:v>2027E</c:v>
                 </c:pt>
               </c:strCache>
             </c:strRef>
           </c:cat>
           <c:val>
             <c:numRef>
-              <c:f>Sheet1!$B$2:$B$3</c:f>
+              <c:f>Sheet1!$B$2:$B$4</c:f>
               <c:numCache>
                 <c:formatCode>General</c:formatCode>
-                <c:ptCount val="2"/>
+                <c:ptCount val="3"/>
                 <c:pt idx="0">
-                  <c:v>640</c:v>
+                  <c:v>30.6</c:v>
                 </c:pt>
                 <c:pt idx="1">
-                  <c:v>900</c:v>
+                  <c:v>89.4</c:v>
+                </c:pt>
+                <c:pt idx="2">
+                  <c:v>177.8</c:v>
+                </c:pt>
+              </c:numCache>
+            </c:numRef>
+          </c:val>
+        </c:ser>
+        <c:ser>
+          <c:idx val="1"/>
+          <c:order val="1"/>
+          <c:tx>
+            <c:strRef>
+              <c:f>Sheet1!$C$1</c:f>
+              <c:strCache>
+                <c:ptCount val="1"/>
+                <c:pt idx="0">
+                  <c:v>資本支出</c:v>
+                </c:pt>
+              </c:strCache>
+            </c:strRef>
+          </c:tx>
+          <c:spPr>
+            <a:solidFill>
+              <a:srgbClr val="E83F0A"/>
+            </a:solidFill>
+          </c:spPr>
+          <c:cat>
+            <c:strRef>
+              <c:f>Sheet1!$A$2:$A$4</c:f>
+              <c:strCache>
+                <c:ptCount val="3"/>
+                <c:pt idx="0">
+                  <c:v>2025A</c:v>
+                </c:pt>
+                <c:pt idx="1">
+                  <c:v>2026E</c:v>
+                </c:pt>
+                <c:pt idx="2">
+                  <c:v>2027E</c:v>
+                </c:pt>
+              </c:strCache>
+            </c:strRef>
+          </c:cat>
+          <c:val>
+            <c:numRef>
+              <c:f>Sheet1!$C$2:$C$4</c:f>
+              <c:numCache>
+                <c:formatCode>General</c:formatCode>
+                <c:ptCount val="3"/>
+                <c:pt idx="0">
+                  <c:v>-103.1</c:v>
+                </c:pt>
+                <c:pt idx="1">
+                  <c:v>-357.1</c:v>
+                </c:pt>
+                <c:pt idx="2">
+                  <c:v>-482.8</c:v>
+                </c:pt>
+              </c:numCache>
+            </c:numRef>
+          </c:val>
+        </c:ser>
+        <c:ser>
+          <c:idx val="2"/>
+          <c:order val="2"/>
+          <c:tx>
+            <c:strRef>
+              <c:f>Sheet1!$D$1</c:f>
+              <c:strCache>
+                <c:ptCount val="1"/>
+                <c:pt idx="0">
+                  <c:v>自由現金流</c:v>
+                </c:pt>
+              </c:strCache>
+            </c:strRef>
+          </c:tx>
+          <c:spPr>
+            <a:solidFill>
+              <a:srgbClr val="4DB848"/>
+            </a:solidFill>
+          </c:spPr>
+          <c:cat>
+            <c:strRef>
+              <c:f>Sheet1!$A$2:$A$4</c:f>
+              <c:strCache>
+                <c:ptCount val="3"/>
+                <c:pt idx="0">
+                  <c:v>2025A</c:v>
+                </c:pt>
+                <c:pt idx="1">
+                  <c:v>2026E</c:v>
+                </c:pt>
+                <c:pt idx="2">
+                  <c:v>2027E</c:v>
+                </c:pt>
+              </c:strCache>
+            </c:strRef>
+          </c:cat>
+          <c:val>
+            <c:numRef>
+              <c:f>Sheet1!$D$2:$D$4</c:f>
+              <c:numCache>
+                <c:formatCode>General</c:formatCode>
+                <c:ptCount val="3"/>
+                <c:pt idx="0">
+                  <c:v>-72.5</c:v>
+                </c:pt>
+                <c:pt idx="1">
+                  <c:v>-272.0</c:v>
+                </c:pt>
+                <c:pt idx="2">
+                  <c:v>-306.1</c:v>
                 </c:pt>
               </c:numCache>
             </c:numRef>
@@ -701,7 +959,7 @@
         <c:axPos val="b"/>
         <c:majorTickMark val="out"/>
         <c:minorTickMark val="none"/>
-        <c:tickLblPos val="nextTo"/>
+        <c:tickLblPos val="low"/>
         <c:crossAx val="-2113994440"/>
         <c:crosses val="autoZero"/>
         <c:auto val="1"/>
@@ -723,7 +981,7 @@
             </a:ln>
           </c:spPr>
         </c:majorGridlines>
-        <c:numFmt formatCode="#,##0" sourceLinked="0"/>
+        <c:numFmt formatCode="0" sourceLinked="0"/>
         <c:majorTickMark val="out"/>
         <c:minorTickMark val="none"/>
         <c:tickLblPos val="nextTo"/>
@@ -731,6 +989,10 @@
         <c:crosses val="autoZero"/>
       </c:valAx>
     </c:plotArea>
+    <c:legend>
+      <c:legendPos val="b"/>
+      <c:overlay val="0"/>
+    </c:legend>
     <c:dispBlanksAs val="gap"/>
   </c:chart>
   <c:txPr>
@@ -43439,31 +43701,25 @@
           <a:p>
             <a:pPr/>
             <a:r>
-              <a:t>加計租賃，總債務與租賃約 500–520 億美元</a:t>
+              <a:t>加權平均票息 5.33%，加權平均到期 2031/8（4.8 年）</a:t>
             </a:r>
           </a:p>
           <a:p>
             <a:pPr/>
             <a:r>
-              <a:t>現金 55 億美元，總流動性 156 億美元</a:t>
+              <a:t>最貴的一筆：DDTL 1.0 約 13.7%，2028/3 到期</a:t>
             </a:r>
           </a:p>
           <a:p>
             <a:pPr/>
             <a:r>
-              <a:t>6/30 後新增 DDTL 26 億、可轉債 37 億美元</a:t>
+              <a:t>10-Q 帳面本金 356 億（6/30），差額來自 9 月可轉債與貸款提領</a:t>
             </a:r>
           </a:p>
           <a:p>
             <a:pPr/>
             <a:r>
-              <a:t>無擔保債票息 8.5–9.75%，可轉債 1.75–2.875%</a:t>
-            </a:r>
-          </a:p>
-          <a:p>
-            <a:pPr/>
-            <a:r>
-              <a:t>DDTL 利率 SOFR+225～+550bp</a:t>
+              <a:t>共識 2026E 總債務 472 億、含租賃 639 億美元</a:t>
             </a:r>
           </a:p>
         </p:txBody>
@@ -43505,7 +43761,7 @@
           <a:lstStyle/>
           <a:p>
             <a:r>
-              <a:t>債務組成（2026/6/30，億美元）</a:t>
+              <a:t>債務組成（億美元）</a:t>
             </a:r>
           </a:p>
         </p:txBody>
@@ -43526,7 +43782,7 @@
           <a:lstStyle/>
           <a:p>
             <a:r>
-              <a:t>債務本金 356 億美元，近半為公司層無擔保票據</a:t>
+              <a:t>總債務 441 億美元，近半為無擔保債與可轉債</a:t>
             </a:r>
           </a:p>
         </p:txBody>
@@ -43550,9 +43806,10 @@
                 <a:tableStyleId>{5C22544A-7EE6-4342-B048-85BDC9FD1C3A}</a:tableStyleId>
               </a:tblPr>
               <a:tblGrid>
-                <a:gridCol w="2962084"/>
-                <a:gridCol w="919267"/>
-                <a:gridCol w="1736394"/>
+                <a:gridCol w="2856481"/>
+                <a:gridCol w="856944"/>
+                <a:gridCol w="761728"/>
+                <a:gridCol w="1142592"/>
               </a:tblGrid>
               <a:tr h="431800">
                 <a:tc>
@@ -43587,7 +43844,28 @@
                             <a:srgbClr val="FFFFFF"/>
                           </a:solidFill>
                         </a:rPr>
-                        <a:t>本金</a:t>
+                        <a:t>金額</a:t>
+                      </a:r>
+                    </a:p>
+                  </a:txBody>
+                  <a:tcPr anchor="ctr">
+                    <a:solidFill>
+                      <a:srgbClr val="00377B"/>
+                    </a:solidFill>
+                  </a:tcPr>
+                </a:tc>
+                <a:tc>
+                  <a:txBody>
+                    <a:bodyPr/>
+                    <a:lstStyle/>
+                    <a:p>
+                      <a:r>
+                        <a:rPr b="1" sz="1400">
+                          <a:solidFill>
+                            <a:srgbClr val="FFFFFF"/>
+                          </a:solidFill>
+                        </a:rPr>
+                        <a:t>檔數</a:t>
                       </a:r>
                     </a:p>
                   </a:txBody>
@@ -43631,7 +43909,7 @@
                             <a:srgbClr val="000000"/>
                           </a:solidFill>
                         </a:rPr>
-                        <a:t>DDTL 定期貸款</a:t>
+                        <a:t>擔保貸款（DDTL、循環額度）</a:t>
                       </a:r>
                     </a:p>
                   </a:txBody>
@@ -43652,7 +43930,7 @@
                             <a:srgbClr val="000000"/>
                           </a:solidFill>
                         </a:rPr>
-                        <a:t>136</a:t>
+                        <a:t>233.3</a:t>
                       </a:r>
                     </a:p>
                   </a:txBody>
@@ -43673,7 +43951,28 @@
                             <a:srgbClr val="000000"/>
                           </a:solidFill>
                         </a:rPr>
-                        <a:t>GPU、客戶合約</a:t>
+                        <a:t>14</a:t>
+                      </a:r>
+                    </a:p>
+                  </a:txBody>
+                  <a:tcPr anchor="ctr">
+                    <a:solidFill>
+                      <a:srgbClr val="FFFFFF"/>
+                    </a:solidFill>
+                  </a:tcPr>
+                </a:tc>
+                <a:tc>
+                  <a:txBody>
+                    <a:bodyPr/>
+                    <a:lstStyle/>
+                    <a:p>
+                      <a:r>
+                        <a:rPr sz="1400">
+                          <a:solidFill>
+                            <a:srgbClr val="000000"/>
+                          </a:solidFill>
+                        </a:rPr>
+                        <a:t>第一順位</a:t>
                       </a:r>
                     </a:p>
                   </a:txBody>
@@ -43696,7 +43995,7 @@
                             <a:srgbClr val="000000"/>
                           </a:solidFill>
                         </a:rPr>
-                        <a:t>票據（無擔保債 + 可轉債）</a:t>
+                        <a:t>無擔保債</a:t>
                       </a:r>
                     </a:p>
                   </a:txBody>
@@ -43717,7 +44016,28 @@
                             <a:srgbClr val="000000"/>
                           </a:solidFill>
                         </a:rPr>
-                        <a:t>166</a:t>
+                        <a:t>99.9</a:t>
+                      </a:r>
+                    </a:p>
+                  </a:txBody>
+                  <a:tcPr anchor="ctr">
+                    <a:solidFill>
+                      <a:srgbClr val="F2F5FA"/>
+                    </a:solidFill>
+                  </a:tcPr>
+                </a:tc>
+                <a:tc>
+                  <a:txBody>
+                    <a:bodyPr/>
+                    <a:lstStyle/>
+                    <a:p>
+                      <a:r>
+                        <a:rPr sz="1400">
+                          <a:solidFill>
+                            <a:srgbClr val="000000"/>
+                          </a:solidFill>
+                        </a:rPr>
+                        <a:t>6</a:t>
                       </a:r>
                     </a:p>
                   </a:txBody>
@@ -43761,7 +44081,7 @@
                             <a:srgbClr val="000000"/>
                           </a:solidFill>
                         </a:rPr>
-                        <a:t>循環信用額度</a:t>
+                        <a:t>可轉債</a:t>
                       </a:r>
                     </a:p>
                   </a:txBody>
@@ -43782,7 +44102,7 @@
                             <a:srgbClr val="000000"/>
                           </a:solidFill>
                         </a:rPr>
-                        <a:t>約 5</a:t>
+                        <a:t>107.9</a:t>
                       </a:r>
                     </a:p>
                   </a:txBody>
@@ -43803,7 +44123,28 @@
                             <a:srgbClr val="000000"/>
                           </a:solidFill>
                         </a:rPr>
-                        <a:t>—</a:t>
+                        <a:t>3</a:t>
+                      </a:r>
+                    </a:p>
+                  </a:txBody>
+                  <a:tcPr anchor="ctr">
+                    <a:solidFill>
+                      <a:srgbClr val="FFFFFF"/>
+                    </a:solidFill>
+                  </a:tcPr>
+                </a:tc>
+                <a:tc>
+                  <a:txBody>
+                    <a:bodyPr/>
+                    <a:lstStyle/>
+                    <a:p>
+                      <a:r>
+                        <a:rPr sz="1400">
+                          <a:solidFill>
+                            <a:srgbClr val="000000"/>
+                          </a:solidFill>
+                        </a:rPr>
+                        <a:t>無</a:t>
                       </a:r>
                     </a:p>
                   </a:txBody>
@@ -43826,7 +44167,7 @@
                             <a:srgbClr val="000000"/>
                           </a:solidFill>
                         </a:rPr>
-                        <a:t>其他（OEM 融資等，估算）</a:t>
+                        <a:t>合計</a:t>
                       </a:r>
                     </a:p>
                   </a:txBody>
@@ -43847,7 +44188,7 @@
                             <a:srgbClr val="000000"/>
                           </a:solidFill>
                         </a:rPr>
-                        <a:t>約 49</a:t>
+                        <a:t>441.1</a:t>
                       </a:r>
                     </a:p>
                   </a:txBody>
@@ -43868,9 +44209,21 @@
                             <a:srgbClr val="000000"/>
                           </a:solidFill>
                         </a:rPr>
-                        <a:t>—</a:t>
+                        <a:t>23</a:t>
                       </a:r>
                     </a:p>
+                  </a:txBody>
+                  <a:tcPr anchor="ctr">
+                    <a:solidFill>
+                      <a:srgbClr val="F2F5FA"/>
+                    </a:solidFill>
+                  </a:tcPr>
+                </a:tc>
+                <a:tc>
+                  <a:txBody>
+                    <a:bodyPr/>
+                    <a:lstStyle/>
+                    <a:p/>
                   </a:txBody>
                   <a:tcPr anchor="ctr">
                     <a:solidFill>
@@ -43891,7 +44244,7 @@
                             <a:srgbClr val="000000"/>
                           </a:solidFill>
                         </a:rPr>
-                        <a:t>合計</a:t>
+                        <a:t>未動用貸款額度</a:t>
                       </a:r>
                     </a:p>
                   </a:txBody>
@@ -43912,9 +44265,21 @@
                             <a:srgbClr val="000000"/>
                           </a:solidFill>
                         </a:rPr>
-                        <a:t>356</a:t>
+                        <a:t>122.5</a:t>
                       </a:r>
                     </a:p>
+                  </a:txBody>
+                  <a:tcPr anchor="ctr">
+                    <a:solidFill>
+                      <a:srgbClr val="FFFFFF"/>
+                    </a:solidFill>
+                  </a:tcPr>
+                </a:tc>
+                <a:tc>
+                  <a:txBody>
+                    <a:bodyPr/>
+                    <a:lstStyle/>
+                    <a:p/>
                   </a:txBody>
                   <a:tcPr anchor="ctr">
                     <a:solidFill>
@@ -43982,7 +44347,7 @@
                   <a:prstClr val="black"/>
                 </a:solidFill>
               </a:rPr>
-              <a:t>資料來源：CoreWeave 10-Q（2026 Q2）、StockTitan；其他類為本報告推算；資料日期：2026/6/30。</a:t>
+              <a:t>資料來源：Bloomberg（DDIS、BEst 共識）、CoreWeave 10-Q；資料日期：2026/10/16。</a:t>
             </a:r>
             <a:endParaRPr lang="zh-TW" altLang="en-US" b="1" kern="0" dirty="0">
               <a:solidFill>
@@ -44029,31 +44394,25 @@
           <a:p>
             <a:pPr/>
             <a:r>
-              <a:t>2026–2027 年到期主要為 DDTL 依合約現金流攤還與 OEM 融資</a:t>
+              <a:t>2030–2032 年到期占總債務 67%</a:t>
             </a:r>
           </a:p>
           <a:p>
             <a:pPr/>
             <a:r>
-              <a:t>公司表示 2029 年前無重大子彈型到期</a:t>
+              <a:t>2026–27 年只有合約攤還：10-Q 列 44 億、62 億美元</a:t>
             </a:r>
           </a:p>
           <a:p>
             <a:pPr/>
             <a:r>
-              <a:t>第一筆無擔保債（9.25%，20 億美元）2030 年 6 月到期</a:t>
+              <a:t>第一筆無擔保債 2030/6 到期（20 億美元，9.25%）</a:t>
             </a:r>
           </a:p>
           <a:p>
             <a:pPr/>
             <a:r>
-              <a:t>短期不是再融資問題，而是新增資本支出的資金來源</a:t>
-            </a:r>
-          </a:p>
-          <a:p>
-            <a:pPr/>
-            <a:r>
-              <a:t>2028–29 年金額為總額減其他年度推算</a:t>
+              <a:t>75 億美元貸款在 Bloomberg 未揭露到期日，餘額可能未反映攤還</a:t>
             </a:r>
           </a:p>
         </p:txBody>
@@ -44095,7 +44454,7 @@
           <a:lstStyle/>
           <a:p>
             <a:r>
-              <a:t>到期本金分布（億美元）</a:t>
+              <a:t>到期分布（億美元）</a:t>
             </a:r>
           </a:p>
         </p:txBody>
@@ -44116,7 +44475,7 @@
           <a:lstStyle/>
           <a:p>
             <a:r>
-              <a:t>2027 年前到期多為合約攤還，無擔保債 2030 年起到期</a:t>
+              <a:t>到期集中在 2030–2032 年，三年合計 297 億美元</a:t>
             </a:r>
           </a:p>
         </p:txBody>
@@ -44182,7 +44541,7 @@
                   <a:prstClr val="black"/>
                 </a:solidFill>
               </a:rPr>
-              <a:t>資料來源：CoreWeave 10-Q（2026 Q2）、Q1 2026 法說會、Forbes；資料日期：2026/6/30。</a:t>
+              <a:t>資料來源：Bloomberg（DDIS，依到期日、僅本金）、CoreWeave 10-Q；資料日期：2026/10/16。</a:t>
             </a:r>
             <a:endParaRPr lang="zh-TW" altLang="en-US" b="1" kern="0" dirty="0">
               <a:solidFill>
@@ -44229,13 +44588,13 @@
           <a:p>
             <a:pPr/>
             <a:r>
-              <a:t>DDTL 占 2026 年發行逾一半，用於已簽約客戶的 GPU</a:t>
+              <a:t>DDTL 占 2026 年發行約一半，用於已簽約客戶的 GPU</a:t>
             </a:r>
           </a:p>
           <a:p>
             <a:pPr/>
             <a:r>
-              <a:t>可轉債 2026 年增至 72 億美元，票息低但有稀釋</a:t>
+              <a:t>可轉債 2026 年增至 82 億美元，三檔超額配售均已行使</a:t>
             </a:r>
           </a:p>
           <a:p>
@@ -44247,7 +44606,7 @@
           <a:p>
             <a:pPr/>
             <a:r>
-              <a:t>公司口徑：年初至 8 月取得逾 320 億美元資金</a:t>
+              <a:t>共識 2026E 全年發債（毛額）約 327 億美元</a:t>
             </a:r>
           </a:p>
         </p:txBody>
@@ -44310,7 +44669,7 @@
           <a:lstStyle/>
           <a:p>
             <a:r>
-              <a:t>2026 年新增債務約 277 億美元，為 2025 年的 2.4 倍</a:t>
+              <a:t>2026 年新增債務約 286 億美元，為 2025 年的 2.4 倍</a:t>
             </a:r>
           </a:p>
         </p:txBody>
@@ -44376,7 +44735,7 @@
                   <a:prstClr val="black"/>
                 </a:solidFill>
               </a:rPr>
-              <a:t>資料來源：CoreWeave 公司公告、Q2 2026 法說會；本報告彙整；資料日期：2026/9/30。</a:t>
+              <a:t>資料來源：CoreWeave 公司公告、Bloomberg（DDIS、BEst）；本報告彙整；資料日期：2026/9/30。</a:t>
             </a:r>
             <a:endParaRPr lang="zh-TW" altLang="en-US" b="1" kern="0" dirty="0">
               <a:solidFill>
@@ -44826,7 +45185,7 @@
                             <a:srgbClr val="000000"/>
                           </a:solidFill>
                         </a:rPr>
-                        <a:t>本週跌至 79.9</a:t>
+                        <a:t>10/14 跌至 79.9</a:t>
                       </a:r>
                     </a:p>
                   </a:txBody>
@@ -45147,7 +45506,7 @@
                             <a:srgbClr val="000000"/>
                           </a:solidFill>
                         </a:rPr>
-                        <a:t>22.5 億美元</a:t>
+                        <a:t>25.9 億美元</a:t>
                       </a:r>
                     </a:p>
                   </a:txBody>
@@ -45210,7 +45569,7 @@
                             <a:srgbClr val="000000"/>
                           </a:solidFill>
                         </a:rPr>
-                        <a:t>由 20 億上調</a:t>
+                        <a:t>含超額配售</a:t>
                       </a:r>
                     </a:p>
                   </a:txBody>
@@ -45268,7 +45627,7 @@
                   <a:prstClr val="black"/>
                 </a:solidFill>
               </a:rPr>
-              <a:t>資料來源：CoreWeave 公司公告、SEC 申報；資料日期：2025/12/31。</a:t>
+              <a:t>資料來源：CoreWeave 公司公告、Bloomberg（DDIS）；資料日期：2025/12/31。</a:t>
             </a:r>
             <a:endParaRPr lang="zh-TW" altLang="en-US" b="1" kern="0" dirty="0">
               <a:solidFill>
@@ -45329,7 +45688,7 @@
         </p:nvGraphicFramePr>
         <p:xfrm>
           <a:off x="407988" y="1203650"/>
-          <a:ext cx="11323324" cy="3556000"/>
+          <a:ext cx="11323326" cy="3556000"/>
         </p:xfrm>
         <a:graphic>
           <a:graphicData uri="http://schemas.openxmlformats.org/drawingml/2006/table">
@@ -45338,12 +45697,12 @@
                 <a:tableStyleId>{5C22544A-7EE6-4342-B048-85BDC9FD1C3A}</a:tableStyleId>
               </a:tblPr>
               <a:tblGrid>
-                <a:gridCol w="1244321"/>
-                <a:gridCol w="1990914"/>
-                <a:gridCol w="2364211"/>
-                <a:gridCol w="1742050"/>
-                <a:gridCol w="1368753"/>
-                <a:gridCol w="2613075"/>
+                <a:gridCol w="1099352"/>
+                <a:gridCol w="1758963"/>
+                <a:gridCol w="2088769"/>
+                <a:gridCol w="1539093"/>
+                <a:gridCol w="1209287"/>
+                <a:gridCol w="3627862"/>
               </a:tblGrid>
               <a:tr h="355600">
                 <a:tc>
@@ -45590,7 +45949,7 @@
                             <a:srgbClr val="000000"/>
                           </a:solidFill>
                         </a:rPr>
-                        <a:t>A3，投資級</a:t>
+                        <a:t>A3，投資級；已提領 29 億</a:t>
                       </a:r>
                     </a:p>
                   </a:txBody>
@@ -45655,7 +46014,7 @@
                             <a:srgbClr val="000000"/>
                           </a:solidFill>
                         </a:rPr>
-                        <a:t>35 億美元</a:t>
+                        <a:t>40 億美元</a:t>
                       </a:r>
                     </a:p>
                   </a:txBody>
@@ -45718,7 +46077,7 @@
                             <a:srgbClr val="000000"/>
                           </a:solidFill>
                         </a:rPr>
-                        <a:t>由 30 億上調</a:t>
+                        <a:t>含超額配售</a:t>
                       </a:r>
                     </a:p>
                   </a:txBody>
@@ -45974,7 +46333,7 @@
                             <a:srgbClr val="000000"/>
                           </a:solidFill>
                         </a:rPr>
-                        <a:t>Ba2 / BB+</a:t>
+                        <a:t>Ba2／BB+；已提領 11 億</a:t>
                       </a:r>
                     </a:p>
                   </a:txBody>
@@ -46221,7 +46580,7 @@
                             <a:srgbClr val="000000"/>
                           </a:solidFill>
                         </a:rPr>
-                        <a:t>約 23 億美元</a:t>
+                        <a:t>約 22.3 億美元</a:t>
                       </a:r>
                     </a:p>
                   </a:txBody>
@@ -46328,7 +46687,7 @@
                             <a:srgbClr val="000000"/>
                           </a:solidFill>
                         </a:rPr>
-                        <a:t>約 2031</a:t>
+                        <a:t>2031/9</a:t>
                       </a:r>
                     </a:p>
                   </a:txBody>
@@ -46349,7 +46708,7 @@
                             <a:srgbClr val="000000"/>
                           </a:solidFill>
                         </a:rPr>
-                        <a:t>合約僅約 3 年</a:t>
+                        <a:t>合約僅約 3 年；已提領 12 億</a:t>
                       </a:r>
                     </a:p>
                   </a:txBody>
@@ -46414,7 +46773,7 @@
                             <a:srgbClr val="000000"/>
                           </a:solidFill>
                         </a:rPr>
-                        <a:t>37 億美元</a:t>
+                        <a:t>42 億美元</a:t>
                       </a:r>
                     </a:p>
                   </a:txBody>
@@ -46477,7 +46836,7 @@
                             <a:srgbClr val="000000"/>
                           </a:solidFill>
                         </a:rPr>
-                        <a:t>轉換價 97.85 美元</a:t>
+                        <a:t>含超額配售；轉換價 97.85 美元</a:t>
                       </a:r>
                     </a:p>
                   </a:txBody>
@@ -46663,7 +47022,7 @@
                   <a:prstClr val="black"/>
                 </a:solidFill>
               </a:rPr>
-              <a:t>資料來源：CoreWeave 公司公告、Moody's、Fitch；資料日期：2026/9/30。</a:t>
+              <a:t>資料來源：CoreWeave 公司公告、Bloomberg（DDIS）、Moody's、Fitch；資料日期：2026/10/16。</a:t>
             </a:r>
             <a:endParaRPr lang="zh-TW" altLang="en-US" b="1" kern="0" dirty="0">
               <a:solidFill>
@@ -46710,25 +47069,25 @@
           <a:p>
             <a:pPr/>
             <a:r>
-              <a:t>Q3 指引 8.6–9.4 億美元，季增約 40%</a:t>
+              <a:t>營業利益／利息：0.54 倍 → 0.35 倍 → 0.78 倍</a:t>
             </a:r>
           </a:p>
           <a:p>
             <a:pPr/>
             <a:r>
-              <a:t>年化約 36 億美元 vs. 2026 營收指引 124–132 億美元</a:t>
+              <a:t>EBITDA／利息約 2.5–3.2 倍，靠折舊加回才撐得住</a:t>
             </a:r>
           </a:p>
           <a:p>
             <a:pPr/>
             <a:r>
-              <a:t>Q2 淨損 6.26 億美元，利息是虧損主因之一</a:t>
+              <a:t>Q3 利息指引 8.6–9.4 億美元，季增約 40%</a:t>
             </a:r>
           </a:p>
           <a:p>
             <a:pPr/>
             <a:r>
-              <a:t>新的公司層資金若以 15% 成本取得，負擔將再加重</a:t>
+              <a:t>共識 2026E 淨損 27 億、2027E 淨損 22 億美元</a:t>
             </a:r>
           </a:p>
         </p:txBody>
@@ -46770,7 +47129,7 @@
           <a:lstStyle/>
           <a:p>
             <a:r>
-              <a:t>淨利息費用（百萬美元）</a:t>
+              <a:t>調整後營業利益 vs. 利息費用（億美元）</a:t>
             </a:r>
           </a:p>
         </p:txBody>
@@ -46791,7 +47150,7 @@
           <a:lstStyle/>
           <a:p>
             <a:r>
-              <a:t>利息費用年化約 36 億美元，約占營收 28%</a:t>
+              <a:t>營業利益不足以支付利息，2027E 利息達 53 億美元</a:t>
             </a:r>
           </a:p>
         </p:txBody>
@@ -46857,7 +47216,7 @@
                   <a:prstClr val="black"/>
                 </a:solidFill>
               </a:rPr>
-              <a:t>資料來源：CoreWeave Q2 2026 財報與指引；資料日期：2026/8/11。</a:t>
+              <a:t>資料來源：Bloomberg（BEst 共識）、CoreWeave Q2 2026 指引；資料日期：2026/10/16。</a:t>
             </a:r>
             <a:endParaRPr lang="zh-TW" altLang="en-US" b="1" kern="0" dirty="0">
               <a:solidFill>
@@ -46878,6 +47237,902 @@
 </file>
 
 <file path=ppt/slides/slide16.xml><?xml version="1.0" encoding="utf-8"?>
+<p:sld xmlns:a="http://schemas.openxmlformats.org/drawingml/2006/main" xmlns:p="http://schemas.openxmlformats.org/presentationml/2006/main" xmlns:r="http://schemas.openxmlformats.org/officeDocument/2006/relationships">
+  <p:cSld>
+    <p:spTree>
+      <p:nvGrpSpPr>
+        <p:cNvPr id="1" name=""/>
+        <p:cNvGrpSpPr/>
+        <p:nvPr/>
+      </p:nvGrpSpPr>
+      <p:grpSpPr/>
+      <p:sp>
+        <p:nvSpPr>
+          <p:cNvPr id="3" name="Title 2"/>
+          <p:cNvSpPr>
+            <a:spLocks noGrp="1"/>
+          </p:cNvSpPr>
+          <p:nvPr>
+            <p:ph type="title"/>
+          </p:nvPr>
+        </p:nvSpPr>
+        <p:spPr/>
+        <p:txBody>
+          <a:bodyPr/>
+          <a:lstStyle/>
+          <a:p>
+            <a:r>
+              <a:t>槓桿 2026E 總債務／EBITDA 6.2 倍，含租賃 8.4 倍</a:t>
+            </a:r>
+          </a:p>
+        </p:txBody>
+      </p:sp>
+      <p:graphicFrame>
+        <p:nvGraphicFramePr>
+          <p:cNvPr id="4" name="Table 3"/>
+          <p:cNvGraphicFramePr>
+            <a:graphicFrameLocks noGrp="1"/>
+          </p:cNvGraphicFramePr>
+          <p:nvPr/>
+        </p:nvGraphicFramePr>
+        <p:xfrm>
+          <a:off x="407988" y="1203650"/>
+          <a:ext cx="11323327" cy="3200400"/>
+        </p:xfrm>
+        <a:graphic>
+          <a:graphicData uri="http://schemas.openxmlformats.org/drawingml/2006/table">
+            <a:tbl>
+              <a:tblPr firstRow="1" bandRow="1">
+                <a:tableStyleId>{5C22544A-7EE6-4342-B048-85BDC9FD1C3A}</a:tableStyleId>
+              </a:tblPr>
+              <a:tblGrid>
+                <a:gridCol w="5764603"/>
+                <a:gridCol w="1852908"/>
+                <a:gridCol w="1852908"/>
+                <a:gridCol w="1852908"/>
+              </a:tblGrid>
+              <a:tr h="355600">
+                <a:tc>
+                  <a:txBody>
+                    <a:bodyPr/>
+                    <a:lstStyle/>
+                    <a:p>
+                      <a:r>
+                        <a:rPr b="1" sz="1200">
+                          <a:solidFill>
+                            <a:srgbClr val="FFFFFF"/>
+                          </a:solidFill>
+                        </a:rPr>
+                        <a:t>指標</a:t>
+                      </a:r>
+                    </a:p>
+                  </a:txBody>
+                  <a:tcPr anchor="ctr">
+                    <a:solidFill>
+                      <a:srgbClr val="00377B"/>
+                    </a:solidFill>
+                  </a:tcPr>
+                </a:tc>
+                <a:tc>
+                  <a:txBody>
+                    <a:bodyPr/>
+                    <a:lstStyle/>
+                    <a:p>
+                      <a:r>
+                        <a:rPr b="1" sz="1200">
+                          <a:solidFill>
+                            <a:srgbClr val="FFFFFF"/>
+                          </a:solidFill>
+                        </a:rPr>
+                        <a:t>2025A</a:t>
+                      </a:r>
+                    </a:p>
+                  </a:txBody>
+                  <a:tcPr anchor="ctr">
+                    <a:solidFill>
+                      <a:srgbClr val="00377B"/>
+                    </a:solidFill>
+                  </a:tcPr>
+                </a:tc>
+                <a:tc>
+                  <a:txBody>
+                    <a:bodyPr/>
+                    <a:lstStyle/>
+                    <a:p>
+                      <a:r>
+                        <a:rPr b="1" sz="1200">
+                          <a:solidFill>
+                            <a:srgbClr val="FFFFFF"/>
+                          </a:solidFill>
+                        </a:rPr>
+                        <a:t>2026E</a:t>
+                      </a:r>
+                    </a:p>
+                  </a:txBody>
+                  <a:tcPr anchor="ctr">
+                    <a:solidFill>
+                      <a:srgbClr val="00377B"/>
+                    </a:solidFill>
+                  </a:tcPr>
+                </a:tc>
+                <a:tc>
+                  <a:txBody>
+                    <a:bodyPr/>
+                    <a:lstStyle/>
+                    <a:p>
+                      <a:r>
+                        <a:rPr b="1" sz="1200">
+                          <a:solidFill>
+                            <a:srgbClr val="FFFFFF"/>
+                          </a:solidFill>
+                        </a:rPr>
+                        <a:t>2027E</a:t>
+                      </a:r>
+                    </a:p>
+                  </a:txBody>
+                  <a:tcPr anchor="ctr">
+                    <a:solidFill>
+                      <a:srgbClr val="00377B"/>
+                    </a:solidFill>
+                  </a:tcPr>
+                </a:tc>
+              </a:tr>
+              <a:tr h="355600">
+                <a:tc>
+                  <a:txBody>
+                    <a:bodyPr/>
+                    <a:lstStyle/>
+                    <a:p>
+                      <a:r>
+                        <a:rPr sz="1200">
+                          <a:solidFill>
+                            <a:srgbClr val="000000"/>
+                          </a:solidFill>
+                        </a:rPr>
+                        <a:t>營收（億美元）</a:t>
+                      </a:r>
+                    </a:p>
+                  </a:txBody>
+                  <a:tcPr anchor="ctr">
+                    <a:solidFill>
+                      <a:srgbClr val="FFFFFF"/>
+                    </a:solidFill>
+                  </a:tcPr>
+                </a:tc>
+                <a:tc>
+                  <a:txBody>
+                    <a:bodyPr/>
+                    <a:lstStyle/>
+                    <a:p>
+                      <a:r>
+                        <a:rPr sz="1200">
+                          <a:solidFill>
+                            <a:srgbClr val="000000"/>
+                          </a:solidFill>
+                        </a:rPr>
+                        <a:t>51.3</a:t>
+                      </a:r>
+                    </a:p>
+                  </a:txBody>
+                  <a:tcPr anchor="ctr">
+                    <a:solidFill>
+                      <a:srgbClr val="FFFFFF"/>
+                    </a:solidFill>
+                  </a:tcPr>
+                </a:tc>
+                <a:tc>
+                  <a:txBody>
+                    <a:bodyPr/>
+                    <a:lstStyle/>
+                    <a:p>
+                      <a:r>
+                        <a:rPr sz="1200">
+                          <a:solidFill>
+                            <a:srgbClr val="000000"/>
+                          </a:solidFill>
+                        </a:rPr>
+                        <a:t>129.0</a:t>
+                      </a:r>
+                    </a:p>
+                  </a:txBody>
+                  <a:tcPr anchor="ctr">
+                    <a:solidFill>
+                      <a:srgbClr val="FFFFFF"/>
+                    </a:solidFill>
+                  </a:tcPr>
+                </a:tc>
+                <a:tc>
+                  <a:txBody>
+                    <a:bodyPr/>
+                    <a:lstStyle/>
+                    <a:p>
+                      <a:r>
+                        <a:rPr sz="1200">
+                          <a:solidFill>
+                            <a:srgbClr val="000000"/>
+                          </a:solidFill>
+                        </a:rPr>
+                        <a:t>265.9</a:t>
+                      </a:r>
+                    </a:p>
+                  </a:txBody>
+                  <a:tcPr anchor="ctr">
+                    <a:solidFill>
+                      <a:srgbClr val="FFFFFF"/>
+                    </a:solidFill>
+                  </a:tcPr>
+                </a:tc>
+              </a:tr>
+              <a:tr h="355600">
+                <a:tc>
+                  <a:txBody>
+                    <a:bodyPr/>
+                    <a:lstStyle/>
+                    <a:p>
+                      <a:r>
+                        <a:rPr sz="1200">
+                          <a:solidFill>
+                            <a:srgbClr val="000000"/>
+                          </a:solidFill>
+                        </a:rPr>
+                        <a:t>調整後 EBITDA（億美元）</a:t>
+                      </a:r>
+                    </a:p>
+                  </a:txBody>
+                  <a:tcPr anchor="ctr">
+                    <a:solidFill>
+                      <a:srgbClr val="F2F5FA"/>
+                    </a:solidFill>
+                  </a:tcPr>
+                </a:tc>
+                <a:tc>
+                  <a:txBody>
+                    <a:bodyPr/>
+                    <a:lstStyle/>
+                    <a:p>
+                      <a:r>
+                        <a:rPr sz="1200">
+                          <a:solidFill>
+                            <a:srgbClr val="000000"/>
+                          </a:solidFill>
+                        </a:rPr>
+                        <a:t>30.9</a:t>
+                      </a:r>
+                    </a:p>
+                  </a:txBody>
+                  <a:tcPr anchor="ctr">
+                    <a:solidFill>
+                      <a:srgbClr val="F2F5FA"/>
+                    </a:solidFill>
+                  </a:tcPr>
+                </a:tc>
+                <a:tc>
+                  <a:txBody>
+                    <a:bodyPr/>
+                    <a:lstStyle/>
+                    <a:p>
+                      <a:r>
+                        <a:rPr sz="1200">
+                          <a:solidFill>
+                            <a:srgbClr val="000000"/>
+                          </a:solidFill>
+                        </a:rPr>
+                        <a:t>75.8</a:t>
+                      </a:r>
+                    </a:p>
+                  </a:txBody>
+                  <a:tcPr anchor="ctr">
+                    <a:solidFill>
+                      <a:srgbClr val="F2F5FA"/>
+                    </a:solidFill>
+                  </a:tcPr>
+                </a:tc>
+                <a:tc>
+                  <a:txBody>
+                    <a:bodyPr/>
+                    <a:lstStyle/>
+                    <a:p>
+                      <a:r>
+                        <a:rPr sz="1200">
+                          <a:solidFill>
+                            <a:srgbClr val="000000"/>
+                          </a:solidFill>
+                        </a:rPr>
+                        <a:t>167.7</a:t>
+                      </a:r>
+                    </a:p>
+                  </a:txBody>
+                  <a:tcPr anchor="ctr">
+                    <a:solidFill>
+                      <a:srgbClr val="F2F5FA"/>
+                    </a:solidFill>
+                  </a:tcPr>
+                </a:tc>
+              </a:tr>
+              <a:tr h="355600">
+                <a:tc>
+                  <a:txBody>
+                    <a:bodyPr/>
+                    <a:lstStyle/>
+                    <a:p>
+                      <a:r>
+                        <a:rPr sz="1200">
+                          <a:solidFill>
+                            <a:srgbClr val="000000"/>
+                          </a:solidFill>
+                        </a:rPr>
+                        <a:t>調整後營業利益（億美元）</a:t>
+                      </a:r>
+                    </a:p>
+                  </a:txBody>
+                  <a:tcPr anchor="ctr">
+                    <a:solidFill>
+                      <a:srgbClr val="FFFFFF"/>
+                    </a:solidFill>
+                  </a:tcPr>
+                </a:tc>
+                <a:tc>
+                  <a:txBody>
+                    <a:bodyPr/>
+                    <a:lstStyle/>
+                    <a:p>
+                      <a:r>
+                        <a:rPr sz="1200">
+                          <a:solidFill>
+                            <a:srgbClr val="000000"/>
+                          </a:solidFill>
+                        </a:rPr>
+                        <a:t>6.7</a:t>
+                      </a:r>
+                    </a:p>
+                  </a:txBody>
+                  <a:tcPr anchor="ctr">
+                    <a:solidFill>
+                      <a:srgbClr val="FFFFFF"/>
+                    </a:solidFill>
+                  </a:tcPr>
+                </a:tc>
+                <a:tc>
+                  <a:txBody>
+                    <a:bodyPr/>
+                    <a:lstStyle/>
+                    <a:p>
+                      <a:r>
+                        <a:rPr sz="1200">
+                          <a:solidFill>
+                            <a:srgbClr val="000000"/>
+                          </a:solidFill>
+                        </a:rPr>
+                        <a:t>10.6</a:t>
+                      </a:r>
+                    </a:p>
+                  </a:txBody>
+                  <a:tcPr anchor="ctr">
+                    <a:solidFill>
+                      <a:srgbClr val="FFFFFF"/>
+                    </a:solidFill>
+                  </a:tcPr>
+                </a:tc>
+                <a:tc>
+                  <a:txBody>
+                    <a:bodyPr/>
+                    <a:lstStyle/>
+                    <a:p>
+                      <a:r>
+                        <a:rPr sz="1200">
+                          <a:solidFill>
+                            <a:srgbClr val="000000"/>
+                          </a:solidFill>
+                        </a:rPr>
+                        <a:t>41.2</a:t>
+                      </a:r>
+                    </a:p>
+                  </a:txBody>
+                  <a:tcPr anchor="ctr">
+                    <a:solidFill>
+                      <a:srgbClr val="FFFFFF"/>
+                    </a:solidFill>
+                  </a:tcPr>
+                </a:tc>
+              </a:tr>
+              <a:tr h="355600">
+                <a:tc>
+                  <a:txBody>
+                    <a:bodyPr/>
+                    <a:lstStyle/>
+                    <a:p>
+                      <a:r>
+                        <a:rPr sz="1200">
+                          <a:solidFill>
+                            <a:srgbClr val="000000"/>
+                          </a:solidFill>
+                        </a:rPr>
+                        <a:t>利息費用（億美元）</a:t>
+                      </a:r>
+                    </a:p>
+                  </a:txBody>
+                  <a:tcPr anchor="ctr">
+                    <a:solidFill>
+                      <a:srgbClr val="F2F5FA"/>
+                    </a:solidFill>
+                  </a:tcPr>
+                </a:tc>
+                <a:tc>
+                  <a:txBody>
+                    <a:bodyPr/>
+                    <a:lstStyle/>
+                    <a:p>
+                      <a:r>
+                        <a:rPr sz="1200">
+                          <a:solidFill>
+                            <a:srgbClr val="000000"/>
+                          </a:solidFill>
+                        </a:rPr>
+                        <a:t>12.3</a:t>
+                      </a:r>
+                    </a:p>
+                  </a:txBody>
+                  <a:tcPr anchor="ctr">
+                    <a:solidFill>
+                      <a:srgbClr val="F2F5FA"/>
+                    </a:solidFill>
+                  </a:tcPr>
+                </a:tc>
+                <a:tc>
+                  <a:txBody>
+                    <a:bodyPr/>
+                    <a:lstStyle/>
+                    <a:p>
+                      <a:r>
+                        <a:rPr sz="1200">
+                          <a:solidFill>
+                            <a:srgbClr val="000000"/>
+                          </a:solidFill>
+                        </a:rPr>
+                        <a:t>30.4</a:t>
+                      </a:r>
+                    </a:p>
+                  </a:txBody>
+                  <a:tcPr anchor="ctr">
+                    <a:solidFill>
+                      <a:srgbClr val="F2F5FA"/>
+                    </a:solidFill>
+                  </a:tcPr>
+                </a:tc>
+                <a:tc>
+                  <a:txBody>
+                    <a:bodyPr/>
+                    <a:lstStyle/>
+                    <a:p>
+                      <a:r>
+                        <a:rPr sz="1200">
+                          <a:solidFill>
+                            <a:srgbClr val="000000"/>
+                          </a:solidFill>
+                        </a:rPr>
+                        <a:t>52.7</a:t>
+                      </a:r>
+                    </a:p>
+                  </a:txBody>
+                  <a:tcPr anchor="ctr">
+                    <a:solidFill>
+                      <a:srgbClr val="F2F5FA"/>
+                    </a:solidFill>
+                  </a:tcPr>
+                </a:tc>
+              </a:tr>
+              <a:tr h="355600">
+                <a:tc>
+                  <a:txBody>
+                    <a:bodyPr/>
+                    <a:lstStyle/>
+                    <a:p>
+                      <a:r>
+                        <a:rPr sz="1200">
+                          <a:solidFill>
+                            <a:srgbClr val="000000"/>
+                          </a:solidFill>
+                        </a:rPr>
+                        <a:t>EBITDA／利息</a:t>
+                      </a:r>
+                    </a:p>
+                  </a:txBody>
+                  <a:tcPr anchor="ctr">
+                    <a:solidFill>
+                      <a:srgbClr val="FFFFFF"/>
+                    </a:solidFill>
+                  </a:tcPr>
+                </a:tc>
+                <a:tc>
+                  <a:txBody>
+                    <a:bodyPr/>
+                    <a:lstStyle/>
+                    <a:p>
+                      <a:r>
+                        <a:rPr sz="1200">
+                          <a:solidFill>
+                            <a:srgbClr val="000000"/>
+                          </a:solidFill>
+                        </a:rPr>
+                        <a:t>2.5x</a:t>
+                      </a:r>
+                    </a:p>
+                  </a:txBody>
+                  <a:tcPr anchor="ctr">
+                    <a:solidFill>
+                      <a:srgbClr val="FFFFFF"/>
+                    </a:solidFill>
+                  </a:tcPr>
+                </a:tc>
+                <a:tc>
+                  <a:txBody>
+                    <a:bodyPr/>
+                    <a:lstStyle/>
+                    <a:p>
+                      <a:r>
+                        <a:rPr sz="1200">
+                          <a:solidFill>
+                            <a:srgbClr val="000000"/>
+                          </a:solidFill>
+                        </a:rPr>
+                        <a:t>2.5x</a:t>
+                      </a:r>
+                    </a:p>
+                  </a:txBody>
+                  <a:tcPr anchor="ctr">
+                    <a:solidFill>
+                      <a:srgbClr val="FFFFFF"/>
+                    </a:solidFill>
+                  </a:tcPr>
+                </a:tc>
+                <a:tc>
+                  <a:txBody>
+                    <a:bodyPr/>
+                    <a:lstStyle/>
+                    <a:p>
+                      <a:r>
+                        <a:rPr sz="1200">
+                          <a:solidFill>
+                            <a:srgbClr val="000000"/>
+                          </a:solidFill>
+                        </a:rPr>
+                        <a:t>3.2x</a:t>
+                      </a:r>
+                    </a:p>
+                  </a:txBody>
+                  <a:tcPr anchor="ctr">
+                    <a:solidFill>
+                      <a:srgbClr val="FFFFFF"/>
+                    </a:solidFill>
+                  </a:tcPr>
+                </a:tc>
+              </a:tr>
+              <a:tr h="355600">
+                <a:tc>
+                  <a:txBody>
+                    <a:bodyPr/>
+                    <a:lstStyle/>
+                    <a:p>
+                      <a:r>
+                        <a:rPr sz="1200">
+                          <a:solidFill>
+                            <a:srgbClr val="000000"/>
+                          </a:solidFill>
+                        </a:rPr>
+                        <a:t>營業利益／利息</a:t>
+                      </a:r>
+                    </a:p>
+                  </a:txBody>
+                  <a:tcPr anchor="ctr">
+                    <a:solidFill>
+                      <a:srgbClr val="F2F5FA"/>
+                    </a:solidFill>
+                  </a:tcPr>
+                </a:tc>
+                <a:tc>
+                  <a:txBody>
+                    <a:bodyPr/>
+                    <a:lstStyle/>
+                    <a:p>
+                      <a:r>
+                        <a:rPr sz="1200">
+                          <a:solidFill>
+                            <a:srgbClr val="000000"/>
+                          </a:solidFill>
+                        </a:rPr>
+                        <a:t>0.54x</a:t>
+                      </a:r>
+                    </a:p>
+                  </a:txBody>
+                  <a:tcPr anchor="ctr">
+                    <a:solidFill>
+                      <a:srgbClr val="F2F5FA"/>
+                    </a:solidFill>
+                  </a:tcPr>
+                </a:tc>
+                <a:tc>
+                  <a:txBody>
+                    <a:bodyPr/>
+                    <a:lstStyle/>
+                    <a:p>
+                      <a:r>
+                        <a:rPr sz="1200">
+                          <a:solidFill>
+                            <a:srgbClr val="000000"/>
+                          </a:solidFill>
+                        </a:rPr>
+                        <a:t>0.35x</a:t>
+                      </a:r>
+                    </a:p>
+                  </a:txBody>
+                  <a:tcPr anchor="ctr">
+                    <a:solidFill>
+                      <a:srgbClr val="F2F5FA"/>
+                    </a:solidFill>
+                  </a:tcPr>
+                </a:tc>
+                <a:tc>
+                  <a:txBody>
+                    <a:bodyPr/>
+                    <a:lstStyle/>
+                    <a:p>
+                      <a:r>
+                        <a:rPr sz="1200">
+                          <a:solidFill>
+                            <a:srgbClr val="000000"/>
+                          </a:solidFill>
+                        </a:rPr>
+                        <a:t>0.78x</a:t>
+                      </a:r>
+                    </a:p>
+                  </a:txBody>
+                  <a:tcPr anchor="ctr">
+                    <a:solidFill>
+                      <a:srgbClr val="F2F5FA"/>
+                    </a:solidFill>
+                  </a:tcPr>
+                </a:tc>
+              </a:tr>
+              <a:tr h="355600">
+                <a:tc>
+                  <a:txBody>
+                    <a:bodyPr/>
+                    <a:lstStyle/>
+                    <a:p>
+                      <a:r>
+                        <a:rPr sz="1200">
+                          <a:solidFill>
+                            <a:srgbClr val="000000"/>
+                          </a:solidFill>
+                        </a:rPr>
+                        <a:t>總債務／EBITDA</a:t>
+                      </a:r>
+                    </a:p>
+                  </a:txBody>
+                  <a:tcPr anchor="ctr">
+                    <a:solidFill>
+                      <a:srgbClr val="FFFFFF"/>
+                    </a:solidFill>
+                  </a:tcPr>
+                </a:tc>
+                <a:tc>
+                  <a:txBody>
+                    <a:bodyPr/>
+                    <a:lstStyle/>
+                    <a:p>
+                      <a:r>
+                        <a:rPr sz="1200">
+                          <a:solidFill>
+                            <a:srgbClr val="000000"/>
+                          </a:solidFill>
+                        </a:rPr>
+                        <a:t>7.0x</a:t>
+                      </a:r>
+                    </a:p>
+                  </a:txBody>
+                  <a:tcPr anchor="ctr">
+                    <a:solidFill>
+                      <a:srgbClr val="FFFFFF"/>
+                    </a:solidFill>
+                  </a:tcPr>
+                </a:tc>
+                <a:tc>
+                  <a:txBody>
+                    <a:bodyPr/>
+                    <a:lstStyle/>
+                    <a:p>
+                      <a:r>
+                        <a:rPr sz="1200">
+                          <a:solidFill>
+                            <a:srgbClr val="000000"/>
+                          </a:solidFill>
+                        </a:rPr>
+                        <a:t>6.2x</a:t>
+                      </a:r>
+                    </a:p>
+                  </a:txBody>
+                  <a:tcPr anchor="ctr">
+                    <a:solidFill>
+                      <a:srgbClr val="FFFFFF"/>
+                    </a:solidFill>
+                  </a:tcPr>
+                </a:tc>
+                <a:tc>
+                  <a:txBody>
+                    <a:bodyPr/>
+                    <a:lstStyle/>
+                    <a:p>
+                      <a:r>
+                        <a:rPr sz="1200">
+                          <a:solidFill>
+                            <a:srgbClr val="000000"/>
+                          </a:solidFill>
+                        </a:rPr>
+                        <a:t>4.3x</a:t>
+                      </a:r>
+                    </a:p>
+                  </a:txBody>
+                  <a:tcPr anchor="ctr">
+                    <a:solidFill>
+                      <a:srgbClr val="FFFFFF"/>
+                    </a:solidFill>
+                  </a:tcPr>
+                </a:tc>
+              </a:tr>
+              <a:tr h="355600">
+                <a:tc>
+                  <a:txBody>
+                    <a:bodyPr/>
+                    <a:lstStyle/>
+                    <a:p>
+                      <a:r>
+                        <a:rPr sz="1200">
+                          <a:solidFill>
+                            <a:srgbClr val="000000"/>
+                          </a:solidFill>
+                        </a:rPr>
+                        <a:t>債務＋租賃／EBITDA</a:t>
+                      </a:r>
+                    </a:p>
+                  </a:txBody>
+                  <a:tcPr anchor="ctr">
+                    <a:solidFill>
+                      <a:srgbClr val="F2F5FA"/>
+                    </a:solidFill>
+                  </a:tcPr>
+                </a:tc>
+                <a:tc>
+                  <a:txBody>
+                    <a:bodyPr/>
+                    <a:lstStyle/>
+                    <a:p>
+                      <a:r>
+                        <a:rPr sz="1200">
+                          <a:solidFill>
+                            <a:srgbClr val="000000"/>
+                          </a:solidFill>
+                        </a:rPr>
+                        <a:t>9.6x</a:t>
+                      </a:r>
+                    </a:p>
+                  </a:txBody>
+                  <a:tcPr anchor="ctr">
+                    <a:solidFill>
+                      <a:srgbClr val="F2F5FA"/>
+                    </a:solidFill>
+                  </a:tcPr>
+                </a:tc>
+                <a:tc>
+                  <a:txBody>
+                    <a:bodyPr/>
+                    <a:lstStyle/>
+                    <a:p>
+                      <a:r>
+                        <a:rPr sz="1200">
+                          <a:solidFill>
+                            <a:srgbClr val="000000"/>
+                          </a:solidFill>
+                        </a:rPr>
+                        <a:t>8.4x</a:t>
+                      </a:r>
+                    </a:p>
+                  </a:txBody>
+                  <a:tcPr anchor="ctr">
+                    <a:solidFill>
+                      <a:srgbClr val="F2F5FA"/>
+                    </a:solidFill>
+                  </a:tcPr>
+                </a:tc>
+                <a:tc>
+                  <a:txBody>
+                    <a:bodyPr/>
+                    <a:lstStyle/>
+                    <a:p>
+                      <a:r>
+                        <a:rPr sz="1200">
+                          <a:solidFill>
+                            <a:srgbClr val="000000"/>
+                          </a:solidFill>
+                        </a:rPr>
+                        <a:t>5.6x</a:t>
+                      </a:r>
+                    </a:p>
+                  </a:txBody>
+                  <a:tcPr anchor="ctr">
+                    <a:solidFill>
+                      <a:srgbClr val="F2F5FA"/>
+                    </a:solidFill>
+                  </a:tcPr>
+                </a:tc>
+              </a:tr>
+            </a:tbl>
+          </a:graphicData>
+        </a:graphic>
+      </p:graphicFrame>
+      <p:sp>
+        <p:nvSpPr>
+          <p:cNvPr id="6" name="頁尾版面配置區 2">
+            <a:extLst>
+              <a:ext uri="{FF2B5EF4-FFF2-40B4-BE49-F238E27FC236}">
+                <a16:creationId xmlns:a16="http://schemas.microsoft.com/office/drawing/2014/main" id="{D860F382-0A64-0ADD-DBCD-581BDE952DAC}"/>
+              </a:ext>
+            </a:extLst>
+          </p:cNvPr>
+          <p:cNvSpPr>
+            <a:spLocks noGrp="1"/>
+          </p:cNvSpPr>
+          <p:nvPr>
+            <p:ph type="ftr" sz="quarter" idx="3"/>
+          </p:nvPr>
+        </p:nvSpPr>
+        <p:spPr>
+          <a:xfrm>
+            <a:off x="333338" y="6437589"/>
+            <a:ext cx="9267862" cy="331777"/>
+          </a:xfrm>
+          <a:prstGeom prst="rect">
+            <a:avLst/>
+          </a:prstGeom>
+        </p:spPr>
+        <p:txBody>
+          <a:bodyPr vert="horz" lIns="91440" tIns="18000" rIns="91440" bIns="18000" rtlCol="0" anchor="ctr"/>
+          <a:lstStyle>
+            <a:lvl1pPr algn="l">
+              <a:defRPr sz="900">
+                <a:solidFill>
+                  <a:schemeClr val="tx1"/>
+                </a:solidFill>
+              </a:defRPr>
+            </a:lvl1pPr>
+          </a:lstStyle>
+          <a:p>
+            <a:r>
+              <a:rPr lang="zh-TW" altLang="en-US" kern="0">
+                <a:solidFill>
+                  <a:prstClr val="black"/>
+                </a:solidFill>
+              </a:rPr>
+              <a:t>資料來源：Bloomberg（BEst 共識）；倍數為本報告計算；資料日期：2026/10/16。</a:t>
+            </a:r>
+            <a:endParaRPr lang="zh-TW" altLang="en-US" b="1" kern="0" dirty="0">
+              <a:solidFill>
+                <a:srgbClr val="D95729">
+                  <a:lumMod val="75000"/>
+                </a:srgbClr>
+              </a:solidFill>
+            </a:endParaRPr>
+          </a:p>
+        </p:txBody>
+      </p:sp>
+    </p:spTree>
+  </p:cSld>
+  <p:clrMapOvr>
+    <a:masterClrMapping/>
+  </p:clrMapOvr>
+</p:sld>
+</file>
+
+<file path=ppt/slides/slide17.xml><?xml version="1.0" encoding="utf-8"?>
 <p:sld xmlns:a="http://schemas.openxmlformats.org/drawingml/2006/main" xmlns:p="http://schemas.openxmlformats.org/presentationml/2006/main" xmlns:r="http://schemas.openxmlformats.org/officeDocument/2006/relationships">
   <p:cSld>
     <p:spTree>
@@ -46924,7 +48179,7 @@
           <a:lstStyle/>
           <a:p>
             <a:r>
-              <a:t>2026 下半年與 2027 年資金缺口</a:t>
+              <a:t>市場共識：2026–2027 年資金缺口</a:t>
             </a:r>
           </a:p>
         </p:txBody>
@@ -46958,7 +48213,201 @@
 </p:sld>
 </file>
 
-<file path=ppt/slides/slide17.xml><?xml version="1.0" encoding="utf-8"?>
+<file path=ppt/slides/slide18.xml><?xml version="1.0" encoding="utf-8"?>
+<p:sld xmlns:a="http://schemas.openxmlformats.org/drawingml/2006/main" xmlns:p="http://schemas.openxmlformats.org/presentationml/2006/main" xmlns:r="http://schemas.openxmlformats.org/officeDocument/2006/relationships">
+  <p:cSld>
+    <p:spTree>
+      <p:nvGrpSpPr>
+        <p:cNvPr id="1" name=""/>
+        <p:cNvGrpSpPr/>
+        <p:nvPr/>
+      </p:nvGrpSpPr>
+      <p:grpSpPr/>
+      <p:sp>
+        <p:nvSpPr>
+          <p:cNvPr id="2" name="Content Placeholder 1"/>
+          <p:cNvSpPr>
+            <a:spLocks noGrp="1"/>
+          </p:cNvSpPr>
+          <p:nvPr>
+            <p:ph idx="24" sz="half"/>
+          </p:nvPr>
+        </p:nvSpPr>
+        <p:spPr/>
+        <p:txBody>
+          <a:bodyPr/>
+          <a:lstStyle/>
+          <a:p>
+            <a:pPr/>
+            <a:r>
+              <a:t>2026E 資本支出 357 億（公司口徑 385 億，指引 350–390 億）</a:t>
+            </a:r>
+          </a:p>
+          <a:p>
+            <a:pPr/>
+            <a:r>
+              <a:t>2027E 資本支出 483 億（公司口徑 520 億），再增約 35%</a:t>
+            </a:r>
+          </a:p>
+          <a:p>
+            <a:pPr/>
+            <a:r>
+              <a:t>營運現金流含大量客戶預付款：遞延收入 2026E 增 50 億、2027E 增 74 億</a:t>
+            </a:r>
+          </a:p>
+          <a:p>
+            <a:pPr/>
+            <a:r>
+              <a:t>營收翻倍也追不上資本支出，2027 年仍大幅燒錢</a:t>
+            </a:r>
+          </a:p>
+        </p:txBody>
+      </p:sp>
+      <p:sp>
+        <p:nvSpPr>
+          <p:cNvPr id="3" name="Text Placeholder 2"/>
+          <p:cNvSpPr>
+            <a:spLocks noGrp="1"/>
+          </p:cNvSpPr>
+          <p:nvPr>
+            <p:ph type="body" idx="23"/>
+          </p:nvPr>
+        </p:nvSpPr>
+        <p:spPr/>
+        <p:txBody>
+          <a:bodyPr/>
+          <a:lstStyle/>
+          <a:p>
+            <a:r>
+              <a:t>重點</a:t>
+            </a:r>
+          </a:p>
+        </p:txBody>
+      </p:sp>
+      <p:sp>
+        <p:nvSpPr>
+          <p:cNvPr id="5" name="Text Placeholder 4"/>
+          <p:cNvSpPr>
+            <a:spLocks noGrp="1"/>
+          </p:cNvSpPr>
+          <p:nvPr>
+            <p:ph type="body" idx="1"/>
+          </p:nvPr>
+        </p:nvSpPr>
+        <p:spPr/>
+        <p:txBody>
+          <a:bodyPr/>
+          <a:lstStyle/>
+          <a:p>
+            <a:r>
+              <a:t>現金流（億美元）</a:t>
+            </a:r>
+          </a:p>
+        </p:txBody>
+      </p:sp>
+      <p:sp>
+        <p:nvSpPr>
+          <p:cNvPr id="6" name="Title 5"/>
+          <p:cNvSpPr>
+            <a:spLocks noGrp="1"/>
+          </p:cNvSpPr>
+          <p:nvPr>
+            <p:ph type="title"/>
+          </p:nvPr>
+        </p:nvSpPr>
+        <p:spPr/>
+        <p:txBody>
+          <a:bodyPr/>
+          <a:lstStyle/>
+          <a:p>
+            <a:r>
+              <a:t>共識：2026–27 年自由現金流合計約 −580 億美元</a:t>
+            </a:r>
+          </a:p>
+        </p:txBody>
+      </p:sp>
+      <p:graphicFrame>
+        <p:nvGraphicFramePr>
+          <p:cNvPr id="7" name="Chart 6"/>
+          <p:cNvGraphicFramePr>
+            <a:graphicFrameLocks noGrp="1"/>
+          </p:cNvGraphicFramePr>
+          <p:nvPr/>
+        </p:nvGraphicFramePr>
+        <p:xfrm>
+          <a:off x="397728" y="1592263"/>
+          <a:ext cx="5617746" cy="4752975"/>
+        </p:xfrm>
+        <a:graphic>
+          <a:graphicData uri="http://schemas.openxmlformats.org/drawingml/2006/chart">
+            <c:chart xmlns:c="http://schemas.openxmlformats.org/drawingml/2006/chart" r:id="rId2"/>
+          </a:graphicData>
+        </a:graphic>
+      </p:graphicFrame>
+      <p:sp>
+        <p:nvSpPr>
+          <p:cNvPr id="9" name="頁尾版面配置區 2">
+            <a:extLst>
+              <a:ext uri="{FF2B5EF4-FFF2-40B4-BE49-F238E27FC236}">
+                <a16:creationId xmlns:a16="http://schemas.microsoft.com/office/drawing/2014/main" id="{D860F382-0A64-0ADD-DBCD-581BDE952DAC}"/>
+              </a:ext>
+            </a:extLst>
+          </p:cNvPr>
+          <p:cNvSpPr>
+            <a:spLocks noGrp="1"/>
+          </p:cNvSpPr>
+          <p:nvPr>
+            <p:ph type="ftr" sz="quarter" idx="3"/>
+          </p:nvPr>
+        </p:nvSpPr>
+        <p:spPr>
+          <a:xfrm>
+            <a:off x="333338" y="6437589"/>
+            <a:ext cx="9247542" cy="331777"/>
+          </a:xfrm>
+          <a:prstGeom prst="rect">
+            <a:avLst/>
+          </a:prstGeom>
+        </p:spPr>
+        <p:txBody>
+          <a:bodyPr vert="horz" lIns="91440" tIns="18000" rIns="91440" bIns="18000" rtlCol="0" anchor="ctr"/>
+          <a:lstStyle>
+            <a:lvl1pPr algn="l">
+              <a:defRPr sz="900">
+                <a:solidFill>
+                  <a:schemeClr val="tx1"/>
+                </a:solidFill>
+              </a:defRPr>
+            </a:lvl1pPr>
+          </a:lstStyle>
+          <a:p>
+            <a:r>
+              <a:rPr lang="zh-TW" altLang="en-US" kern="0">
+                <a:solidFill>
+                  <a:prstClr val="black"/>
+                </a:solidFill>
+              </a:rPr>
+              <a:t>資料來源：Bloomberg（BEst 共識）；資料日期：2026/10/16。</a:t>
+            </a:r>
+            <a:endParaRPr lang="zh-TW" altLang="en-US" b="1" kern="0" dirty="0">
+              <a:solidFill>
+                <a:srgbClr val="D95729">
+                  <a:lumMod val="75000"/>
+                </a:srgbClr>
+              </a:solidFill>
+            </a:endParaRPr>
+          </a:p>
+        </p:txBody>
+      </p:sp>
+    </p:spTree>
+  </p:cSld>
+  <p:clrMapOvr>
+    <a:masterClrMapping/>
+  </p:clrMapOvr>
+</p:sld>
+</file>
+
+<file path=ppt/slides/slide19.xml><?xml version="1.0" encoding="utf-8"?>
 <p:sld xmlns:a="http://schemas.openxmlformats.org/drawingml/2006/main" xmlns:p="http://schemas.openxmlformats.org/presentationml/2006/main" xmlns:r="http://schemas.openxmlformats.org/officeDocument/2006/relationships">
   <p:cSld>
     <p:spTree>
@@ -46984,7 +48433,7 @@
           <a:lstStyle/>
           <a:p>
             <a:r>
-              <a:t>2026 下半年資金大致打平，但緩衝僅約 10–15 億美元</a:t>
+              <a:t>共識預期每年發債逾 330 億美元，總債務 2027E 達 721 億</a:t>
             </a:r>
           </a:p>
         </p:txBody>
@@ -46999,7 +48448,7 @@
         </p:nvGraphicFramePr>
         <p:xfrm>
           <a:off x="407988" y="1203650"/>
-          <a:ext cx="11323326" cy="2590800"/>
+          <a:ext cx="11323326" cy="3454400"/>
         </p:xfrm>
         <a:graphic>
           <a:graphicData uri="http://schemas.openxmlformats.org/drawingml/2006/table">
@@ -47008,10 +48457,879 @@
                 <a:tableStyleId>{5C22544A-7EE6-4342-B048-85BDC9FD1C3A}</a:tableStyleId>
               </a:tblPr>
               <a:tblGrid>
-                <a:gridCol w="2369998"/>
-                <a:gridCol w="2764998"/>
-                <a:gridCol w="4871664"/>
-                <a:gridCol w="1316666"/>
+                <a:gridCol w="4884572"/>
+                <a:gridCol w="1998234"/>
+                <a:gridCol w="2220260"/>
+                <a:gridCol w="2220260"/>
+              </a:tblGrid>
+              <a:tr h="431800">
+                <a:tc>
+                  <a:txBody>
+                    <a:bodyPr/>
+                    <a:lstStyle/>
+                    <a:p>
+                      <a:r>
+                        <a:rPr b="1" sz="1400">
+                          <a:solidFill>
+                            <a:srgbClr val="FFFFFF"/>
+                          </a:solidFill>
+                        </a:rPr>
+                        <a:t>項目（億美元）</a:t>
+                      </a:r>
+                    </a:p>
+                  </a:txBody>
+                  <a:tcPr anchor="ctr">
+                    <a:solidFill>
+                      <a:srgbClr val="00377B"/>
+                    </a:solidFill>
+                  </a:tcPr>
+                </a:tc>
+                <a:tc>
+                  <a:txBody>
+                    <a:bodyPr/>
+                    <a:lstStyle/>
+                    <a:p>
+                      <a:r>
+                        <a:rPr b="1" sz="1400">
+                          <a:solidFill>
+                            <a:srgbClr val="FFFFFF"/>
+                          </a:solidFill>
+                        </a:rPr>
+                        <a:t>2025A</a:t>
+                      </a:r>
+                    </a:p>
+                  </a:txBody>
+                  <a:tcPr anchor="ctr">
+                    <a:solidFill>
+                      <a:srgbClr val="00377B"/>
+                    </a:solidFill>
+                  </a:tcPr>
+                </a:tc>
+                <a:tc>
+                  <a:txBody>
+                    <a:bodyPr/>
+                    <a:lstStyle/>
+                    <a:p>
+                      <a:r>
+                        <a:rPr b="1" sz="1400">
+                          <a:solidFill>
+                            <a:srgbClr val="FFFFFF"/>
+                          </a:solidFill>
+                        </a:rPr>
+                        <a:t>2026E</a:t>
+                      </a:r>
+                    </a:p>
+                  </a:txBody>
+                  <a:tcPr anchor="ctr">
+                    <a:solidFill>
+                      <a:srgbClr val="00377B"/>
+                    </a:solidFill>
+                  </a:tcPr>
+                </a:tc>
+                <a:tc>
+                  <a:txBody>
+                    <a:bodyPr/>
+                    <a:lstStyle/>
+                    <a:p>
+                      <a:r>
+                        <a:rPr b="1" sz="1400">
+                          <a:solidFill>
+                            <a:srgbClr val="FFFFFF"/>
+                          </a:solidFill>
+                        </a:rPr>
+                        <a:t>2027E</a:t>
+                      </a:r>
+                    </a:p>
+                  </a:txBody>
+                  <a:tcPr anchor="ctr">
+                    <a:solidFill>
+                      <a:srgbClr val="00377B"/>
+                    </a:solidFill>
+                  </a:tcPr>
+                </a:tc>
+              </a:tr>
+              <a:tr h="431800">
+                <a:tc>
+                  <a:txBody>
+                    <a:bodyPr/>
+                    <a:lstStyle/>
+                    <a:p>
+                      <a:r>
+                        <a:rPr sz="1400">
+                          <a:solidFill>
+                            <a:srgbClr val="000000"/>
+                          </a:solidFill>
+                        </a:rPr>
+                        <a:t>自由現金流</a:t>
+                      </a:r>
+                    </a:p>
+                  </a:txBody>
+                  <a:tcPr anchor="ctr">
+                    <a:solidFill>
+                      <a:srgbClr val="FFFFFF"/>
+                    </a:solidFill>
+                  </a:tcPr>
+                </a:tc>
+                <a:tc>
+                  <a:txBody>
+                    <a:bodyPr/>
+                    <a:lstStyle/>
+                    <a:p>
+                      <a:r>
+                        <a:rPr sz="1400">
+                          <a:solidFill>
+                            <a:srgbClr val="000000"/>
+                          </a:solidFill>
+                        </a:rPr>
+                        <a:t>−72.5</a:t>
+                      </a:r>
+                    </a:p>
+                  </a:txBody>
+                  <a:tcPr anchor="ctr">
+                    <a:solidFill>
+                      <a:srgbClr val="FFFFFF"/>
+                    </a:solidFill>
+                  </a:tcPr>
+                </a:tc>
+                <a:tc>
+                  <a:txBody>
+                    <a:bodyPr/>
+                    <a:lstStyle/>
+                    <a:p>
+                      <a:r>
+                        <a:rPr sz="1400">
+                          <a:solidFill>
+                            <a:srgbClr val="000000"/>
+                          </a:solidFill>
+                        </a:rPr>
+                        <a:t>−272.0</a:t>
+                      </a:r>
+                    </a:p>
+                  </a:txBody>
+                  <a:tcPr anchor="ctr">
+                    <a:solidFill>
+                      <a:srgbClr val="FFFFFF"/>
+                    </a:solidFill>
+                  </a:tcPr>
+                </a:tc>
+                <a:tc>
+                  <a:txBody>
+                    <a:bodyPr/>
+                    <a:lstStyle/>
+                    <a:p>
+                      <a:r>
+                        <a:rPr sz="1400">
+                          <a:solidFill>
+                            <a:srgbClr val="000000"/>
+                          </a:solidFill>
+                        </a:rPr>
+                        <a:t>−306.1</a:t>
+                      </a:r>
+                    </a:p>
+                  </a:txBody>
+                  <a:tcPr anchor="ctr">
+                    <a:solidFill>
+                      <a:srgbClr val="FFFFFF"/>
+                    </a:solidFill>
+                  </a:tcPr>
+                </a:tc>
+              </a:tr>
+              <a:tr h="431800">
+                <a:tc>
+                  <a:txBody>
+                    <a:bodyPr/>
+                    <a:lstStyle/>
+                    <a:p>
+                      <a:r>
+                        <a:rPr sz="1400">
+                          <a:solidFill>
+                            <a:srgbClr val="000000"/>
+                          </a:solidFill>
+                        </a:rPr>
+                        <a:t>發債（毛額）</a:t>
+                      </a:r>
+                    </a:p>
+                  </a:txBody>
+                  <a:tcPr anchor="ctr">
+                    <a:solidFill>
+                      <a:srgbClr val="F2F5FA"/>
+                    </a:solidFill>
+                  </a:tcPr>
+                </a:tc>
+                <a:tc>
+                  <a:txBody>
+                    <a:bodyPr/>
+                    <a:lstStyle/>
+                    <a:p>
+                      <a:r>
+                        <a:rPr sz="1400">
+                          <a:solidFill>
+                            <a:srgbClr val="000000"/>
+                          </a:solidFill>
+                        </a:rPr>
+                        <a:t>118.3</a:t>
+                      </a:r>
+                    </a:p>
+                  </a:txBody>
+                  <a:tcPr anchor="ctr">
+                    <a:solidFill>
+                      <a:srgbClr val="F2F5FA"/>
+                    </a:solidFill>
+                  </a:tcPr>
+                </a:tc>
+                <a:tc>
+                  <a:txBody>
+                    <a:bodyPr/>
+                    <a:lstStyle/>
+                    <a:p>
+                      <a:r>
+                        <a:rPr sz="1400">
+                          <a:solidFill>
+                            <a:srgbClr val="000000"/>
+                          </a:solidFill>
+                        </a:rPr>
+                        <a:t>327.0</a:t>
+                      </a:r>
+                    </a:p>
+                  </a:txBody>
+                  <a:tcPr anchor="ctr">
+                    <a:solidFill>
+                      <a:srgbClr val="F2F5FA"/>
+                    </a:solidFill>
+                  </a:tcPr>
+                </a:tc>
+                <a:tc>
+                  <a:txBody>
+                    <a:bodyPr/>
+                    <a:lstStyle/>
+                    <a:p>
+                      <a:r>
+                        <a:rPr sz="1400">
+                          <a:solidFill>
+                            <a:srgbClr val="000000"/>
+                          </a:solidFill>
+                        </a:rPr>
+                        <a:t>338.0</a:t>
+                      </a:r>
+                    </a:p>
+                  </a:txBody>
+                  <a:tcPr anchor="ctr">
+                    <a:solidFill>
+                      <a:srgbClr val="F2F5FA"/>
+                    </a:solidFill>
+                  </a:tcPr>
+                </a:tc>
+              </a:tr>
+              <a:tr h="431800">
+                <a:tc>
+                  <a:txBody>
+                    <a:bodyPr/>
+                    <a:lstStyle/>
+                    <a:p>
+                      <a:r>
+                        <a:rPr sz="1400">
+                          <a:solidFill>
+                            <a:srgbClr val="000000"/>
+                          </a:solidFill>
+                        </a:rPr>
+                        <a:t>淨借款（扣除還款）</a:t>
+                      </a:r>
+                    </a:p>
+                  </a:txBody>
+                  <a:tcPr anchor="ctr">
+                    <a:solidFill>
+                      <a:srgbClr val="FFFFFF"/>
+                    </a:solidFill>
+                  </a:tcPr>
+                </a:tc>
+                <a:tc>
+                  <a:txBody>
+                    <a:bodyPr/>
+                    <a:lstStyle/>
+                    <a:p>
+                      <a:r>
+                        <a:rPr sz="1400">
+                          <a:solidFill>
+                            <a:srgbClr val="000000"/>
+                          </a:solidFill>
+                        </a:rPr>
+                        <a:t>84.3</a:t>
+                      </a:r>
+                    </a:p>
+                  </a:txBody>
+                  <a:tcPr anchor="ctr">
+                    <a:solidFill>
+                      <a:srgbClr val="FFFFFF"/>
+                    </a:solidFill>
+                  </a:tcPr>
+                </a:tc>
+                <a:tc>
+                  <a:txBody>
+                    <a:bodyPr/>
+                    <a:lstStyle/>
+                    <a:p>
+                      <a:r>
+                        <a:rPr sz="1400">
+                          <a:solidFill>
+                            <a:srgbClr val="000000"/>
+                          </a:solidFill>
+                        </a:rPr>
+                        <a:t>258.5</a:t>
+                      </a:r>
+                    </a:p>
+                  </a:txBody>
+                  <a:tcPr anchor="ctr">
+                    <a:solidFill>
+                      <a:srgbClr val="FFFFFF"/>
+                    </a:solidFill>
+                  </a:tcPr>
+                </a:tc>
+                <a:tc>
+                  <a:txBody>
+                    <a:bodyPr/>
+                    <a:lstStyle/>
+                    <a:p>
+                      <a:r>
+                        <a:rPr sz="1400">
+                          <a:solidFill>
+                            <a:srgbClr val="000000"/>
+                          </a:solidFill>
+                        </a:rPr>
+                        <a:t>281.4</a:t>
+                      </a:r>
+                    </a:p>
+                  </a:txBody>
+                  <a:tcPr anchor="ctr">
+                    <a:solidFill>
+                      <a:srgbClr val="FFFFFF"/>
+                    </a:solidFill>
+                  </a:tcPr>
+                </a:tc>
+              </a:tr>
+              <a:tr h="431800">
+                <a:tc>
+                  <a:txBody>
+                    <a:bodyPr/>
+                    <a:lstStyle/>
+                    <a:p>
+                      <a:r>
+                        <a:rPr sz="1400">
+                          <a:solidFill>
+                            <a:srgbClr val="000000"/>
+                          </a:solidFill>
+                        </a:rPr>
+                        <a:t>股權融資</a:t>
+                      </a:r>
+                    </a:p>
+                  </a:txBody>
+                  <a:tcPr anchor="ctr">
+                    <a:solidFill>
+                      <a:srgbClr val="F2F5FA"/>
+                    </a:solidFill>
+                  </a:tcPr>
+                </a:tc>
+                <a:tc>
+                  <a:txBody>
+                    <a:bodyPr/>
+                    <a:lstStyle/>
+                    <a:p>
+                      <a:r>
+                        <a:rPr sz="1400">
+                          <a:solidFill>
+                            <a:srgbClr val="000000"/>
+                          </a:solidFill>
+                        </a:rPr>
+                        <a:t>0.2</a:t>
+                      </a:r>
+                    </a:p>
+                  </a:txBody>
+                  <a:tcPr anchor="ctr">
+                    <a:solidFill>
+                      <a:srgbClr val="F2F5FA"/>
+                    </a:solidFill>
+                  </a:tcPr>
+                </a:tc>
+                <a:tc>
+                  <a:txBody>
+                    <a:bodyPr/>
+                    <a:lstStyle/>
+                    <a:p>
+                      <a:r>
+                        <a:rPr sz="1400">
+                          <a:solidFill>
+                            <a:srgbClr val="000000"/>
+                          </a:solidFill>
+                        </a:rPr>
+                        <a:t>29.8</a:t>
+                      </a:r>
+                    </a:p>
+                  </a:txBody>
+                  <a:tcPr anchor="ctr">
+                    <a:solidFill>
+                      <a:srgbClr val="F2F5FA"/>
+                    </a:solidFill>
+                  </a:tcPr>
+                </a:tc>
+                <a:tc>
+                  <a:txBody>
+                    <a:bodyPr/>
+                    <a:lstStyle/>
+                    <a:p>
+                      <a:r>
+                        <a:rPr sz="1400">
+                          <a:solidFill>
+                            <a:srgbClr val="000000"/>
+                          </a:solidFill>
+                        </a:rPr>
+                        <a:t>22.9</a:t>
+                      </a:r>
+                    </a:p>
+                  </a:txBody>
+                  <a:tcPr anchor="ctr">
+                    <a:solidFill>
+                      <a:srgbClr val="F2F5FA"/>
+                    </a:solidFill>
+                  </a:tcPr>
+                </a:tc>
+              </a:tr>
+              <a:tr h="431800">
+                <a:tc>
+                  <a:txBody>
+                    <a:bodyPr/>
+                    <a:lstStyle/>
+                    <a:p>
+                      <a:r>
+                        <a:rPr sz="1400">
+                          <a:solidFill>
+                            <a:srgbClr val="000000"/>
+                          </a:solidFill>
+                        </a:rPr>
+                        <a:t>期末總債務</a:t>
+                      </a:r>
+                    </a:p>
+                  </a:txBody>
+                  <a:tcPr anchor="ctr">
+                    <a:solidFill>
+                      <a:srgbClr val="FFFFFF"/>
+                    </a:solidFill>
+                  </a:tcPr>
+                </a:tc>
+                <a:tc>
+                  <a:txBody>
+                    <a:bodyPr/>
+                    <a:lstStyle/>
+                    <a:p>
+                      <a:r>
+                        <a:rPr sz="1400">
+                          <a:solidFill>
+                            <a:srgbClr val="000000"/>
+                          </a:solidFill>
+                        </a:rPr>
+                        <a:t>216.2</a:t>
+                      </a:r>
+                    </a:p>
+                  </a:txBody>
+                  <a:tcPr anchor="ctr">
+                    <a:solidFill>
+                      <a:srgbClr val="FFFFFF"/>
+                    </a:solidFill>
+                  </a:tcPr>
+                </a:tc>
+                <a:tc>
+                  <a:txBody>
+                    <a:bodyPr/>
+                    <a:lstStyle/>
+                    <a:p>
+                      <a:r>
+                        <a:rPr sz="1400">
+                          <a:solidFill>
+                            <a:srgbClr val="000000"/>
+                          </a:solidFill>
+                        </a:rPr>
+                        <a:t>472.4</a:t>
+                      </a:r>
+                    </a:p>
+                  </a:txBody>
+                  <a:tcPr anchor="ctr">
+                    <a:solidFill>
+                      <a:srgbClr val="FFFFFF"/>
+                    </a:solidFill>
+                  </a:tcPr>
+                </a:tc>
+                <a:tc>
+                  <a:txBody>
+                    <a:bodyPr/>
+                    <a:lstStyle/>
+                    <a:p>
+                      <a:r>
+                        <a:rPr sz="1400">
+                          <a:solidFill>
+                            <a:srgbClr val="000000"/>
+                          </a:solidFill>
+                        </a:rPr>
+                        <a:t>721.2</a:t>
+                      </a:r>
+                    </a:p>
+                  </a:txBody>
+                  <a:tcPr anchor="ctr">
+                    <a:solidFill>
+                      <a:srgbClr val="FFFFFF"/>
+                    </a:solidFill>
+                  </a:tcPr>
+                </a:tc>
+              </a:tr>
+              <a:tr h="431800">
+                <a:tc>
+                  <a:txBody>
+                    <a:bodyPr/>
+                    <a:lstStyle/>
+                    <a:p>
+                      <a:r>
+                        <a:rPr sz="1400">
+                          <a:solidFill>
+                            <a:srgbClr val="000000"/>
+                          </a:solidFill>
+                        </a:rPr>
+                        <a:t>期末債務＋租賃</a:t>
+                      </a:r>
+                    </a:p>
+                  </a:txBody>
+                  <a:tcPr anchor="ctr">
+                    <a:solidFill>
+                      <a:srgbClr val="F2F5FA"/>
+                    </a:solidFill>
+                  </a:tcPr>
+                </a:tc>
+                <a:tc>
+                  <a:txBody>
+                    <a:bodyPr/>
+                    <a:lstStyle/>
+                    <a:p>
+                      <a:r>
+                        <a:rPr sz="1400">
+                          <a:solidFill>
+                            <a:srgbClr val="000000"/>
+                          </a:solidFill>
+                        </a:rPr>
+                        <a:t>298.2</a:t>
+                      </a:r>
+                    </a:p>
+                  </a:txBody>
+                  <a:tcPr anchor="ctr">
+                    <a:solidFill>
+                      <a:srgbClr val="F2F5FA"/>
+                    </a:solidFill>
+                  </a:tcPr>
+                </a:tc>
+                <a:tc>
+                  <a:txBody>
+                    <a:bodyPr/>
+                    <a:lstStyle/>
+                    <a:p>
+                      <a:r>
+                        <a:rPr sz="1400">
+                          <a:solidFill>
+                            <a:srgbClr val="000000"/>
+                          </a:solidFill>
+                        </a:rPr>
+                        <a:t>638.9</a:t>
+                      </a:r>
+                    </a:p>
+                  </a:txBody>
+                  <a:tcPr anchor="ctr">
+                    <a:solidFill>
+                      <a:srgbClr val="F2F5FA"/>
+                    </a:solidFill>
+                  </a:tcPr>
+                </a:tc>
+                <a:tc>
+                  <a:txBody>
+                    <a:bodyPr/>
+                    <a:lstStyle/>
+                    <a:p>
+                      <a:r>
+                        <a:rPr sz="1400">
+                          <a:solidFill>
+                            <a:srgbClr val="000000"/>
+                          </a:solidFill>
+                        </a:rPr>
+                        <a:t>937.1</a:t>
+                      </a:r>
+                    </a:p>
+                  </a:txBody>
+                  <a:tcPr anchor="ctr">
+                    <a:solidFill>
+                      <a:srgbClr val="F2F5FA"/>
+                    </a:solidFill>
+                  </a:tcPr>
+                </a:tc>
+              </a:tr>
+              <a:tr h="431800">
+                <a:tc>
+                  <a:txBody>
+                    <a:bodyPr/>
+                    <a:lstStyle/>
+                    <a:p>
+                      <a:r>
+                        <a:rPr sz="1400">
+                          <a:solidFill>
+                            <a:srgbClr val="000000"/>
+                          </a:solidFill>
+                        </a:rPr>
+                        <a:t>期末現金</a:t>
+                      </a:r>
+                    </a:p>
+                  </a:txBody>
+                  <a:tcPr anchor="ctr">
+                    <a:solidFill>
+                      <a:srgbClr val="FFFFFF"/>
+                    </a:solidFill>
+                  </a:tcPr>
+                </a:tc>
+                <a:tc>
+                  <a:txBody>
+                    <a:bodyPr/>
+                    <a:lstStyle/>
+                    <a:p>
+                      <a:r>
+                        <a:rPr sz="1400">
+                          <a:solidFill>
+                            <a:srgbClr val="000000"/>
+                          </a:solidFill>
+                        </a:rPr>
+                        <a:t>31.3</a:t>
+                      </a:r>
+                    </a:p>
+                  </a:txBody>
+                  <a:tcPr anchor="ctr">
+                    <a:solidFill>
+                      <a:srgbClr val="FFFFFF"/>
+                    </a:solidFill>
+                  </a:tcPr>
+                </a:tc>
+                <a:tc>
+                  <a:txBody>
+                    <a:bodyPr/>
+                    <a:lstStyle/>
+                    <a:p>
+                      <a:r>
+                        <a:rPr sz="1400">
+                          <a:solidFill>
+                            <a:srgbClr val="000000"/>
+                          </a:solidFill>
+                        </a:rPr>
+                        <a:t>48.7</a:t>
+                      </a:r>
+                    </a:p>
+                  </a:txBody>
+                  <a:tcPr anchor="ctr">
+                    <a:solidFill>
+                      <a:srgbClr val="FFFFFF"/>
+                    </a:solidFill>
+                  </a:tcPr>
+                </a:tc>
+                <a:tc>
+                  <a:txBody>
+                    <a:bodyPr/>
+                    <a:lstStyle/>
+                    <a:p>
+                      <a:r>
+                        <a:rPr sz="1400">
+                          <a:solidFill>
+                            <a:srgbClr val="000000"/>
+                          </a:solidFill>
+                        </a:rPr>
+                        <a:t>51.2</a:t>
+                      </a:r>
+                    </a:p>
+                  </a:txBody>
+                  <a:tcPr anchor="ctr">
+                    <a:solidFill>
+                      <a:srgbClr val="FFFFFF"/>
+                    </a:solidFill>
+                  </a:tcPr>
+                </a:tc>
+              </a:tr>
+            </a:tbl>
+          </a:graphicData>
+        </a:graphic>
+      </p:graphicFrame>
+      <p:sp>
+        <p:nvSpPr>
+          <p:cNvPr id="6" name="頁尾版面配置區 2">
+            <a:extLst>
+              <a:ext uri="{FF2B5EF4-FFF2-40B4-BE49-F238E27FC236}">
+                <a16:creationId xmlns:a16="http://schemas.microsoft.com/office/drawing/2014/main" id="{D860F382-0A64-0ADD-DBCD-581BDE952DAC}"/>
+              </a:ext>
+            </a:extLst>
+          </p:cNvPr>
+          <p:cNvSpPr>
+            <a:spLocks noGrp="1"/>
+          </p:cNvSpPr>
+          <p:nvPr>
+            <p:ph type="ftr" sz="quarter" idx="3"/>
+          </p:nvPr>
+        </p:nvSpPr>
+        <p:spPr>
+          <a:xfrm>
+            <a:off x="333338" y="6437589"/>
+            <a:ext cx="9267862" cy="331777"/>
+          </a:xfrm>
+          <a:prstGeom prst="rect">
+            <a:avLst/>
+          </a:prstGeom>
+        </p:spPr>
+        <p:txBody>
+          <a:bodyPr vert="horz" lIns="91440" tIns="18000" rIns="91440" bIns="18000" rtlCol="0" anchor="ctr"/>
+          <a:lstStyle>
+            <a:lvl1pPr algn="l">
+              <a:defRPr sz="900">
+                <a:solidFill>
+                  <a:schemeClr val="tx1"/>
+                </a:solidFill>
+              </a:defRPr>
+            </a:lvl1pPr>
+          </a:lstStyle>
+          <a:p>
+            <a:r>
+              <a:rPr lang="zh-TW" altLang="en-US" kern="0">
+                <a:solidFill>
+                  <a:prstClr val="black"/>
+                </a:solidFill>
+              </a:rPr>
+              <a:t>資料來源：Bloomberg（BEst 共識）；資料日期：2026/10/16。</a:t>
+            </a:r>
+            <a:endParaRPr lang="zh-TW" altLang="en-US" b="1" kern="0" dirty="0">
+              <a:solidFill>
+                <a:srgbClr val="D95729">
+                  <a:lumMod val="75000"/>
+                </a:srgbClr>
+              </a:solidFill>
+            </a:endParaRPr>
+          </a:p>
+        </p:txBody>
+      </p:sp>
+    </p:spTree>
+  </p:cSld>
+  <p:clrMapOvr>
+    <a:masterClrMapping/>
+  </p:clrMapOvr>
+</p:sld>
+</file>
+
+<file path=ppt/slides/slide2.xml><?xml version="1.0" encoding="utf-8"?>
+<p:sld xmlns:a="http://schemas.openxmlformats.org/drawingml/2006/main" xmlns:p="http://schemas.openxmlformats.org/presentationml/2006/main" xmlns:r="http://schemas.openxmlformats.org/officeDocument/2006/relationships">
+  <p:cSld>
+    <p:spTree>
+      <p:nvGrpSpPr>
+        <p:cNvPr id="1" name=""/>
+        <p:cNvGrpSpPr/>
+        <p:nvPr/>
+      </p:nvGrpSpPr>
+      <p:grpSpPr/>
+      <p:sp>
+        <p:nvSpPr>
+          <p:cNvPr id="2" name="Text Placeholder 1"/>
+          <p:cNvSpPr>
+            <a:spLocks noGrp="1"/>
+          </p:cNvSpPr>
+          <p:nvPr>
+            <p:ph type="body" idx="10" sz="quarter"/>
+          </p:nvPr>
+        </p:nvSpPr>
+        <p:spPr/>
+        <p:txBody>
+          <a:bodyPr/>
+          <a:lstStyle/>
+          <a:p>
+            <a:r>
+              <a:t>結論摘要</a:t>
+            </a:r>
+          </a:p>
+          <a:p>
+            <a:r>
+              <a:t>信用市場訊號</a:t>
+            </a:r>
+          </a:p>
+          <a:p>
+            <a:r>
+              <a:t>債務結構與發債量</a:t>
+            </a:r>
+          </a:p>
+          <a:p>
+            <a:r>
+              <a:t>融資需求</a:t>
+            </a:r>
+          </a:p>
+          <a:p>
+            <a:r>
+              <a:t>其他風險與後續觀察</a:t>
+            </a:r>
+          </a:p>
+        </p:txBody>
+      </p:sp>
+    </p:spTree>
+  </p:cSld>
+  <p:clrMapOvr>
+    <a:masterClrMapping/>
+  </p:clrMapOvr>
+</p:sld>
+</file>
+
+<file path=ppt/slides/slide20.xml><?xml version="1.0" encoding="utf-8"?>
+<p:sld xmlns:a="http://schemas.openxmlformats.org/drawingml/2006/main" xmlns:p="http://schemas.openxmlformats.org/presentationml/2006/main" xmlns:r="http://schemas.openxmlformats.org/officeDocument/2006/relationships">
+  <p:cSld>
+    <p:spTree>
+      <p:nvGrpSpPr>
+        <p:cNvPr id="1" name=""/>
+        <p:cNvGrpSpPr/>
+        <p:nvPr/>
+      </p:nvGrpSpPr>
+      <p:grpSpPr/>
+      <p:sp>
+        <p:nvSpPr>
+          <p:cNvPr id="3" name="Title 2"/>
+          <p:cNvSpPr>
+            <a:spLocks noGrp="1"/>
+          </p:cNvSpPr>
+          <p:nvPr>
+            <p:ph type="title"/>
+          </p:nvPr>
+        </p:nvSpPr>
+        <p:spPr/>
+        <p:txBody>
+          <a:bodyPr/>
+          <a:lstStyle/>
+          <a:p>
+            <a:r>
+              <a:t>2026 下半年資金大致足夠，緩衝約 20 億美元</a:t>
+            </a:r>
+          </a:p>
+        </p:txBody>
+      </p:sp>
+      <p:graphicFrame>
+        <p:nvGraphicFramePr>
+          <p:cNvPr id="4" name="Table 3"/>
+          <p:cNvGraphicFramePr>
+            <a:graphicFrameLocks noGrp="1"/>
+          </p:cNvGraphicFramePr>
+          <p:nvPr/>
+        </p:nvGraphicFramePr>
+        <p:xfrm>
+          <a:off x="407988" y="1203650"/>
+          <a:ext cx="11323327" cy="2590800"/>
+        </p:xfrm>
+        <a:graphic>
+          <a:graphicData uri="http://schemas.openxmlformats.org/drawingml/2006/table">
+            <a:tbl>
+              <a:tblPr firstRow="1" bandRow="1">
+                <a:tableStyleId>{5C22544A-7EE6-4342-B048-85BDC9FD1C3A}</a:tableStyleId>
+              </a:tblPr>
+              <a:tblGrid>
+                <a:gridCol w="2717598"/>
+                <a:gridCol w="1509777"/>
+                <a:gridCol w="5586175"/>
+                <a:gridCol w="1509777"/>
               </a:tblGrid>
               <a:tr h="431800">
                 <a:tc>
@@ -47132,7 +49450,7 @@
                             <a:srgbClr val="000000"/>
                           </a:solidFill>
                         </a:rPr>
-                        <a:t>約 199（179–219）</a:t>
+                        <a:t>約 214</a:t>
                       </a:r>
                     </a:p>
                   </a:txBody>
@@ -47328,7 +49646,7 @@
                             <a:srgbClr val="000000"/>
                           </a:solidFill>
                         </a:rPr>
-                        <a:t>63</a:t>
+                        <a:t>68</a:t>
                       </a:r>
                     </a:p>
                   </a:txBody>
@@ -47375,7 +49693,7 @@
                             <a:srgbClr val="000000"/>
                           </a:solidFill>
                         </a:rPr>
-                        <a:t>下半年營運現金流（假設同上半年）</a:t>
+                        <a:t>下半年營運現金流</a:t>
                       </a:r>
                     </a:p>
                   </a:txBody>
@@ -47396,7 +49714,7 @@
                             <a:srgbClr val="000000"/>
                           </a:solidFill>
                         </a:rPr>
-                        <a:t>約 37</a:t>
+                        <a:t>約 53</a:t>
                       </a:r>
                     </a:p>
                   </a:txBody>
@@ -47440,7 +49758,7 @@
                             <a:srgbClr val="000000"/>
                           </a:solidFill>
                         </a:rPr>
-                        <a:t>約 243</a:t>
+                        <a:t>約 258</a:t>
                       </a:r>
                     </a:p>
                   </a:txBody>
@@ -47482,7 +49800,7 @@
                             <a:srgbClr val="000000"/>
                           </a:solidFill>
                         </a:rPr>
-                        <a:t>約 256</a:t>
+                        <a:t>約 277</a:t>
                       </a:r>
                     </a:p>
                   </a:txBody>
@@ -47540,7 +49858,7 @@
                   <a:prstClr val="black"/>
                 </a:solidFill>
               </a:rPr>
-              <a:t>資料來源：本報告估算：全年資本支出指引 350–390 億減上半年 171 億；未動用額度多綁定特定合約；現金須保留營運水位；資料日期：2026/6/30。</a:t>
+              <a:t>資料來源：本報告估算：共識全年資本支出 385 億、營運現金流 89 億減上半年實際；未動用額度多綁定特定合約；資料日期：2026/10/16。</a:t>
             </a:r>
             <a:endParaRPr lang="zh-TW" altLang="en-US" b="1" kern="0" dirty="0">
               <a:solidFill>
@@ -47560,7 +49878,7 @@
 </p:sld>
 </file>
 
-<file path=ppt/slides/slide18.xml><?xml version="1.0" encoding="utf-8"?>
+<file path=ppt/slides/slide21.xml><?xml version="1.0" encoding="utf-8"?>
 <p:sld xmlns:a="http://schemas.openxmlformats.org/drawingml/2006/main" xmlns:p="http://schemas.openxmlformats.org/presentationml/2006/main" xmlns:r="http://schemas.openxmlformats.org/officeDocument/2006/relationships">
   <p:cSld>
     <p:spTree>
@@ -47586,452 +49904,6 @@
           <a:lstStyle/>
           <a:p>
             <a:r>
-              <a:t>2027 年估計仍需新融資約 280–330 億美元</a:t>
-            </a:r>
-          </a:p>
-        </p:txBody>
-      </p:sp>
-      <p:graphicFrame>
-        <p:nvGraphicFramePr>
-          <p:cNvPr id="4" name="Table 3"/>
-          <p:cNvGraphicFramePr>
-            <a:graphicFrameLocks noGrp="1"/>
-          </p:cNvGraphicFramePr>
-          <p:nvPr/>
-        </p:nvGraphicFramePr>
-        <p:xfrm>
-          <a:off x="407988" y="1203650"/>
-          <a:ext cx="11323326" cy="2159000"/>
-        </p:xfrm>
-        <a:graphic>
-          <a:graphicData uri="http://schemas.openxmlformats.org/drawingml/2006/table">
-            <a:tbl>
-              <a:tblPr firstRow="1" bandRow="1">
-                <a:tableStyleId>{5C22544A-7EE6-4342-B048-85BDC9FD1C3A}</a:tableStyleId>
-              </a:tblPr>
-              <a:tblGrid>
-                <a:gridCol w="2485608"/>
-                <a:gridCol w="2209429"/>
-                <a:gridCol w="6628289"/>
-              </a:tblGrid>
-              <a:tr h="431800">
-                <a:tc>
-                  <a:txBody>
-                    <a:bodyPr/>
-                    <a:lstStyle/>
-                    <a:p>
-                      <a:r>
-                        <a:rPr b="1" sz="1400">
-                          <a:solidFill>
-                            <a:srgbClr val="FFFFFF"/>
-                          </a:solidFill>
-                        </a:rPr>
-                        <a:t>項目</a:t>
-                      </a:r>
-                    </a:p>
-                  </a:txBody>
-                  <a:tcPr anchor="ctr">
-                    <a:solidFill>
-                      <a:srgbClr val="00377B"/>
-                    </a:solidFill>
-                  </a:tcPr>
-                </a:tc>
-                <a:tc>
-                  <a:txBody>
-                    <a:bodyPr/>
-                    <a:lstStyle/>
-                    <a:p>
-                      <a:r>
-                        <a:rPr b="1" sz="1400">
-                          <a:solidFill>
-                            <a:srgbClr val="FFFFFF"/>
-                          </a:solidFill>
-                        </a:rPr>
-                        <a:t>億美元</a:t>
-                      </a:r>
-                    </a:p>
-                  </a:txBody>
-                  <a:tcPr anchor="ctr">
-                    <a:solidFill>
-                      <a:srgbClr val="00377B"/>
-                    </a:solidFill>
-                  </a:tcPr>
-                </a:tc>
-                <a:tc>
-                  <a:txBody>
-                    <a:bodyPr/>
-                    <a:lstStyle/>
-                    <a:p>
-                      <a:r>
-                        <a:rPr b="1" sz="1400">
-                          <a:solidFill>
-                            <a:srgbClr val="FFFFFF"/>
-                          </a:solidFill>
-                        </a:rPr>
-                        <a:t>假設</a:t>
-                      </a:r>
-                    </a:p>
-                  </a:txBody>
-                  <a:tcPr anchor="ctr">
-                    <a:solidFill>
-                      <a:srgbClr val="00377B"/>
-                    </a:solidFill>
-                  </a:tcPr>
-                </a:tc>
-              </a:tr>
-              <a:tr h="431800">
-                <a:tc>
-                  <a:txBody>
-                    <a:bodyPr/>
-                    <a:lstStyle/>
-                    <a:p>
-                      <a:r>
-                        <a:rPr sz="1400">
-                          <a:solidFill>
-                            <a:srgbClr val="000000"/>
-                          </a:solidFill>
-                        </a:rPr>
-                        <a:t>資本支出</a:t>
-                      </a:r>
-                    </a:p>
-                  </a:txBody>
-                  <a:tcPr anchor="ctr">
-                    <a:solidFill>
-                      <a:srgbClr val="FFFFFF"/>
-                    </a:solidFill>
-                  </a:tcPr>
-                </a:tc>
-                <a:tc>
-                  <a:txBody>
-                    <a:bodyPr/>
-                    <a:lstStyle/>
-                    <a:p>
-                      <a:r>
-                        <a:rPr sz="1400">
-                          <a:solidFill>
-                            <a:srgbClr val="000000"/>
-                          </a:solidFill>
-                        </a:rPr>
-                        <a:t>約 370</a:t>
-                      </a:r>
-                    </a:p>
-                  </a:txBody>
-                  <a:tcPr anchor="ctr">
-                    <a:solidFill>
-                      <a:srgbClr val="FFFFFF"/>
-                    </a:solidFill>
-                  </a:tcPr>
-                </a:tc>
-                <a:tc>
-                  <a:txBody>
-                    <a:bodyPr/>
-                    <a:lstStyle/>
-                    <a:p>
-                      <a:r>
-                        <a:rPr sz="1400">
-                          <a:solidFill>
-                            <a:srgbClr val="000000"/>
-                          </a:solidFill>
-                        </a:rPr>
-                        <a:t>與 2026 年指引中值持平；公司尚未給 2027 指引</a:t>
-                      </a:r>
-                    </a:p>
-                  </a:txBody>
-                  <a:tcPr anchor="ctr">
-                    <a:solidFill>
-                      <a:srgbClr val="FFFFFF"/>
-                    </a:solidFill>
-                  </a:tcPr>
-                </a:tc>
-              </a:tr>
-              <a:tr h="431800">
-                <a:tc>
-                  <a:txBody>
-                    <a:bodyPr/>
-                    <a:lstStyle/>
-                    <a:p>
-                      <a:r>
-                        <a:rPr sz="1400">
-                          <a:solidFill>
-                            <a:srgbClr val="000000"/>
-                          </a:solidFill>
-                        </a:rPr>
-                        <a:t>到期本金</a:t>
-                      </a:r>
-                    </a:p>
-                  </a:txBody>
-                  <a:tcPr anchor="ctr">
-                    <a:solidFill>
-                      <a:srgbClr val="F2F5FA"/>
-                    </a:solidFill>
-                  </a:tcPr>
-                </a:tc>
-                <a:tc>
-                  <a:txBody>
-                    <a:bodyPr/>
-                    <a:lstStyle/>
-                    <a:p>
-                      <a:r>
-                        <a:rPr sz="1400">
-                          <a:solidFill>
-                            <a:srgbClr val="000000"/>
-                          </a:solidFill>
-                        </a:rPr>
-                        <a:t>62</a:t>
-                      </a:r>
-                    </a:p>
-                  </a:txBody>
-                  <a:tcPr anchor="ctr">
-                    <a:solidFill>
-                      <a:srgbClr val="F2F5FA"/>
-                    </a:solidFill>
-                  </a:tcPr>
-                </a:tc>
-                <a:tc>
-                  <a:txBody>
-                    <a:bodyPr/>
-                    <a:lstStyle/>
-                    <a:p>
-                      <a:r>
-                        <a:rPr sz="1400">
-                          <a:solidFill>
-                            <a:srgbClr val="000000"/>
-                          </a:solidFill>
-                        </a:rPr>
-                        <a:t>10-Q 到期表</a:t>
-                      </a:r>
-                    </a:p>
-                  </a:txBody>
-                  <a:tcPr anchor="ctr">
-                    <a:solidFill>
-                      <a:srgbClr val="F2F5FA"/>
-                    </a:solidFill>
-                  </a:tcPr>
-                </a:tc>
-              </a:tr>
-              <a:tr h="431800">
-                <a:tc>
-                  <a:txBody>
-                    <a:bodyPr/>
-                    <a:lstStyle/>
-                    <a:p>
-                      <a:r>
-                        <a:rPr sz="1400">
-                          <a:solidFill>
-                            <a:srgbClr val="000000"/>
-                          </a:solidFill>
-                        </a:rPr>
-                        <a:t>減：營運現金流</a:t>
-                      </a:r>
-                    </a:p>
-                  </a:txBody>
-                  <a:tcPr anchor="ctr">
-                    <a:solidFill>
-                      <a:srgbClr val="FFFFFF"/>
-                    </a:solidFill>
-                  </a:tcPr>
-                </a:tc>
-                <a:tc>
-                  <a:txBody>
-                    <a:bodyPr/>
-                    <a:lstStyle/>
-                    <a:p>
-                      <a:r>
-                        <a:rPr sz="1400">
-                          <a:solidFill>
-                            <a:srgbClr val="000000"/>
-                          </a:solidFill>
-                        </a:rPr>
-                        <a:t>−100 ～ −150</a:t>
-                      </a:r>
-                    </a:p>
-                  </a:txBody>
-                  <a:tcPr anchor="ctr">
-                    <a:solidFill>
-                      <a:srgbClr val="FFFFFF"/>
-                    </a:solidFill>
-                  </a:tcPr>
-                </a:tc>
-                <a:tc>
-                  <a:txBody>
-                    <a:bodyPr/>
-                    <a:lstStyle/>
-                    <a:p>
-                      <a:r>
-                        <a:rPr sz="1400">
-                          <a:solidFill>
-                            <a:srgbClr val="000000"/>
-                          </a:solidFill>
-                        </a:rPr>
-                        <a:t>營收成長、含客戶預付款</a:t>
-                      </a:r>
-                    </a:p>
-                  </a:txBody>
-                  <a:tcPr anchor="ctr">
-                    <a:solidFill>
-                      <a:srgbClr val="FFFFFF"/>
-                    </a:solidFill>
-                  </a:tcPr>
-                </a:tc>
-              </a:tr>
-              <a:tr h="431800">
-                <a:tc>
-                  <a:txBody>
-                    <a:bodyPr/>
-                    <a:lstStyle/>
-                    <a:p>
-                      <a:r>
-                        <a:rPr sz="1400">
-                          <a:solidFill>
-                            <a:srgbClr val="000000"/>
-                          </a:solidFill>
-                        </a:rPr>
-                        <a:t>新融資需求</a:t>
-                      </a:r>
-                    </a:p>
-                  </a:txBody>
-                  <a:tcPr anchor="ctr">
-                    <a:solidFill>
-                      <a:srgbClr val="F2F5FA"/>
-                    </a:solidFill>
-                  </a:tcPr>
-                </a:tc>
-                <a:tc>
-                  <a:txBody>
-                    <a:bodyPr/>
-                    <a:lstStyle/>
-                    <a:p>
-                      <a:r>
-                        <a:rPr sz="1400">
-                          <a:solidFill>
-                            <a:srgbClr val="000000"/>
-                          </a:solidFill>
-                        </a:rPr>
-                        <a:t>約 280–330</a:t>
-                      </a:r>
-                    </a:p>
-                  </a:txBody>
-                  <a:tcPr anchor="ctr">
-                    <a:solidFill>
-                      <a:srgbClr val="F2F5FA"/>
-                    </a:solidFill>
-                  </a:tcPr>
-                </a:tc>
-                <a:tc>
-                  <a:txBody>
-                    <a:bodyPr/>
-                    <a:lstStyle/>
-                    <a:p>
-                      <a:r>
-                        <a:rPr sz="1400">
-                          <a:solidFill>
-                            <a:srgbClr val="000000"/>
-                          </a:solidFill>
-                        </a:rPr>
-                        <a:t>與 2026 年發行量相當</a:t>
-                      </a:r>
-                    </a:p>
-                  </a:txBody>
-                  <a:tcPr anchor="ctr">
-                    <a:solidFill>
-                      <a:srgbClr val="F2F5FA"/>
-                    </a:solidFill>
-                  </a:tcPr>
-                </a:tc>
-              </a:tr>
-            </a:tbl>
-          </a:graphicData>
-        </a:graphic>
-      </p:graphicFrame>
-      <p:sp>
-        <p:nvSpPr>
-          <p:cNvPr id="6" name="頁尾版面配置區 2">
-            <a:extLst>
-              <a:ext uri="{FF2B5EF4-FFF2-40B4-BE49-F238E27FC236}">
-                <a16:creationId xmlns:a16="http://schemas.microsoft.com/office/drawing/2014/main" id="{D860F382-0A64-0ADD-DBCD-581BDE952DAC}"/>
-              </a:ext>
-            </a:extLst>
-          </p:cNvPr>
-          <p:cNvSpPr>
-            <a:spLocks noGrp="1"/>
-          </p:cNvSpPr>
-          <p:nvPr>
-            <p:ph type="ftr" sz="quarter" idx="3"/>
-          </p:nvPr>
-        </p:nvSpPr>
-        <p:spPr>
-          <a:xfrm>
-            <a:off x="333338" y="6437589"/>
-            <a:ext cx="9267862" cy="331777"/>
-          </a:xfrm>
-          <a:prstGeom prst="rect">
-            <a:avLst/>
-          </a:prstGeom>
-        </p:spPr>
-        <p:txBody>
-          <a:bodyPr vert="horz" lIns="91440" tIns="18000" rIns="91440" bIns="18000" rtlCol="0" anchor="ctr"/>
-          <a:lstStyle>
-            <a:lvl1pPr algn="l">
-              <a:defRPr sz="900">
-                <a:solidFill>
-                  <a:schemeClr val="tx1"/>
-                </a:solidFill>
-              </a:defRPr>
-            </a:lvl1pPr>
-          </a:lstStyle>
-          <a:p>
-            <a:r>
-              <a:rPr lang="zh-TW" altLang="en-US" kern="0">
-                <a:solidFill>
-                  <a:prstClr val="black"/>
-                </a:solidFill>
-              </a:rPr>
-              <a:t>資料來源：本報告情境估算；CoreWeave 10-Q、Q2 2026 法說會；資料日期：2026/10/15。</a:t>
-            </a:r>
-            <a:endParaRPr lang="zh-TW" altLang="en-US" b="1" kern="0" dirty="0">
-              <a:solidFill>
-                <a:srgbClr val="D95729">
-                  <a:lumMod val="75000"/>
-                </a:srgbClr>
-              </a:solidFill>
-            </a:endParaRPr>
-          </a:p>
-        </p:txBody>
-      </p:sp>
-    </p:spTree>
-  </p:cSld>
-  <p:clrMapOvr>
-    <a:masterClrMapping/>
-  </p:clrMapOvr>
-</p:sld>
-</file>
-
-<file path=ppt/slides/slide19.xml><?xml version="1.0" encoding="utf-8"?>
-<p:sld xmlns:a="http://schemas.openxmlformats.org/drawingml/2006/main" xmlns:p="http://schemas.openxmlformats.org/presentationml/2006/main" xmlns:r="http://schemas.openxmlformats.org/officeDocument/2006/relationships">
-  <p:cSld>
-    <p:spTree>
-      <p:nvGrpSpPr>
-        <p:cNvPr id="1" name=""/>
-        <p:cNvGrpSpPr/>
-        <p:nvPr/>
-      </p:nvGrpSpPr>
-      <p:grpSpPr/>
-      <p:sp>
-        <p:nvSpPr>
-          <p:cNvPr id="3" name="Title 2"/>
-          <p:cNvSpPr>
-            <a:spLocks noGrp="1"/>
-          </p:cNvSpPr>
-          <p:nvPr>
-            <p:ph type="title"/>
-          </p:nvPr>
-        </p:nvSpPr>
-        <p:spPr/>
-        <p:txBody>
-          <a:bodyPr/>
-          <a:lstStyle/>
-          <a:p>
-            <a:r>
               <a:t>專案層管道仍開放，公司層無擔保債已近乎關閉</a:t>
             </a:r>
           </a:p>
@@ -48056,9 +49928,9 @@
                 <a:tableStyleId>{5C22544A-7EE6-4342-B048-85BDC9FD1C3A}</a:tableStyleId>
               </a:tblPr>
               <a:tblGrid>
-                <a:gridCol w="1811732"/>
-                <a:gridCol w="4076398"/>
-                <a:gridCol w="5435197"/>
+                <a:gridCol w="1526740"/>
+                <a:gridCol w="3816852"/>
+                <a:gridCol w="5979735"/>
               </a:tblGrid>
               <a:tr h="431800">
                 <a:tc>
@@ -48214,7 +50086,7 @@
                             <a:srgbClr val="000000"/>
                           </a:solidFill>
                         </a:rPr>
-                        <a:t>GPU 與客戶合約</a:t>
+                        <a:t>GPU 與客戶合約（第一順位）</a:t>
                       </a:r>
                     </a:p>
                   </a:txBody>
@@ -48300,7 +50172,7 @@
                             <a:srgbClr val="000000"/>
                           </a:solidFill>
                         </a:rPr>
-                        <a:t>無擔保債殖利率約 15%</a:t>
+                        <a:t>無擔保債殖利率約 15%；可轉債 4.7–6.4%</a:t>
                       </a:r>
                     </a:p>
                   </a:txBody>
@@ -48365,7 +50237,7 @@
                             <a:srgbClr val="000000"/>
                           </a:solidFill>
                         </a:rPr>
-                        <a:t>新無擔保債幾乎不可行</a:t>
+                        <a:t>新無擔保債幾乎不可行；9 月可轉債已跌至 89.7</a:t>
                       </a:r>
                     </a:p>
                   </a:txBody>
@@ -48488,7 +50360,7 @@
                   <a:prstClr val="black"/>
                 </a:solidFill>
               </a:rPr>
-              <a:t>資料來源：CoreWeave 公司公告、TRACE、Bloomberg；資料日期：2026/10/15。</a:t>
+              <a:t>資料來源：Bloomberg（YAS）、CoreWeave 公司公告、TRACE；資料日期：2026/10/16。</a:t>
             </a:r>
             <a:endParaRPr lang="zh-TW" altLang="en-US" b="1" kern="0" dirty="0">
               <a:solidFill>
@@ -48508,7 +50380,7 @@
 </p:sld>
 </file>
 
-<file path=ppt/slides/slide2.xml><?xml version="1.0" encoding="utf-8"?>
+<file path=ppt/slides/slide22.xml><?xml version="1.0" encoding="utf-8"?>
 <p:sld xmlns:a="http://schemas.openxmlformats.org/drawingml/2006/main" xmlns:p="http://schemas.openxmlformats.org/presentationml/2006/main" xmlns:r="http://schemas.openxmlformats.org/officeDocument/2006/relationships">
   <p:cSld>
     <p:spTree>
@@ -48534,65 +50406,6 @@
           <a:lstStyle/>
           <a:p>
             <a:r>
-              <a:t>結論摘要</a:t>
-            </a:r>
-          </a:p>
-          <a:p>
-            <a:r>
-              <a:t>信用市場訊號</a:t>
-            </a:r>
-          </a:p>
-          <a:p>
-            <a:r>
-              <a:t>債務結構與發債量</a:t>
-            </a:r>
-          </a:p>
-          <a:p>
-            <a:r>
-              <a:t>融資需求</a:t>
-            </a:r>
-          </a:p>
-          <a:p>
-            <a:r>
-              <a:t>其他風險與後續觀察</a:t>
-            </a:r>
-          </a:p>
-        </p:txBody>
-      </p:sp>
-    </p:spTree>
-  </p:cSld>
-  <p:clrMapOvr>
-    <a:masterClrMapping/>
-  </p:clrMapOvr>
-</p:sld>
-</file>
-
-<file path=ppt/slides/slide20.xml><?xml version="1.0" encoding="utf-8"?>
-<p:sld xmlns:a="http://schemas.openxmlformats.org/drawingml/2006/main" xmlns:p="http://schemas.openxmlformats.org/presentationml/2006/main" xmlns:r="http://schemas.openxmlformats.org/officeDocument/2006/relationships">
-  <p:cSld>
-    <p:spTree>
-      <p:nvGrpSpPr>
-        <p:cNvPr id="1" name=""/>
-        <p:cNvGrpSpPr/>
-        <p:nvPr/>
-      </p:nvGrpSpPr>
-      <p:grpSpPr/>
-      <p:sp>
-        <p:nvSpPr>
-          <p:cNvPr id="2" name="Text Placeholder 1"/>
-          <p:cNvSpPr>
-            <a:spLocks noGrp="1"/>
-          </p:cNvSpPr>
-          <p:nvPr>
-            <p:ph type="body" idx="10" sz="quarter"/>
-          </p:nvPr>
-        </p:nvSpPr>
-        <p:spPr/>
-        <p:txBody>
-          <a:bodyPr/>
-          <a:lstStyle/>
-          <a:p>
-            <a:r>
               <a:t>其他風險與後續觀察</a:t>
             </a:r>
           </a:p>
@@ -48648,7 +50461,7 @@
 </p:sld>
 </file>
 
-<file path=ppt/slides/slide21.xml><?xml version="1.0" encoding="utf-8"?>
+<file path=ppt/slides/slide23.xml><?xml version="1.0" encoding="utf-8"?>
 <p:sld xmlns:a="http://schemas.openxmlformats.org/drawingml/2006/main" xmlns:p="http://schemas.openxmlformats.org/presentationml/2006/main" xmlns:r="http://schemas.openxmlformats.org/officeDocument/2006/relationships">
   <p:cSld>
     <p:spTree>
@@ -48675,7 +50488,7 @@
           <a:p>
             <a:pPr/>
             <a:r>
-              <a:t>2026 年底目標上線 1.7GW；2025 年曾因開發商延遲下修營收</a:t>
+              <a:t>2026 年底目標上線 1.7GW；共識 2026E 1.8GW、2027E 3.1GW</a:t>
             </a:r>
           </a:p>
           <a:p>
@@ -48687,7 +50500,7 @@
           <a:p>
             <a:pPr/>
             <a:r>
-              <a:t>GPU 擔保貸款 136 億美元；DDTL 5.5 貸款約 5 年、合約約 3 年</a:t>
+              <a:t>DDTL 5.5 貸款約 5 年、合約約 3 年</a:t>
             </a:r>
           </a:p>
           <a:p>
@@ -48844,7 +50657,7 @@
                   <a:prstClr val="black"/>
                 </a:solidFill>
               </a:rPr>
-              <a:t>資料來源：CoreWeave 10-K、10-Q、Q2 財報、SemiAnalysis、TheStreet；資料日期：2026/10/15。</a:t>
+              <a:t>資料來源：CoreWeave 10-K、10-Q、Q2 財報、Bloomberg（BEst）、TheStreet；資料日期：2026/10/16。</a:t>
             </a:r>
             <a:endParaRPr lang="zh-TW" altLang="en-US" b="1" kern="0" dirty="0">
               <a:solidFill>
@@ -48864,7 +50677,7 @@
 </p:sld>
 </file>
 
-<file path=ppt/slides/slide22.xml><?xml version="1.0" encoding="utf-8"?>
+<file path=ppt/slides/slide24.xml><?xml version="1.0" encoding="utf-8"?>
 <p:sld xmlns:a="http://schemas.openxmlformats.org/drawingml/2006/main" xmlns:p="http://schemas.openxmlformats.org/presentationml/2006/main" xmlns:r="http://schemas.openxmlformats.org/officeDocument/2006/relationships">
   <p:cSld>
     <p:spTree>
@@ -48909,7 +50722,7 @@
           <a:p>
             <a:pPr/>
             <a:r>
-              <a:t>評等與市場價格落差大，評等下調風險上升</a:t>
+              <a:t>評等與市場價格落差大，展望下修風險上升</a:t>
             </a:r>
           </a:p>
         </p:txBody>
@@ -48952,13 +50765,13 @@
           <a:p>
             <a:pPr/>
             <a:r>
-              <a:t>Backlog 1,042 億美元，年增約 246%</a:t>
+              <a:t>Backlog 1,042 億美元（6/30），年增約 246%</a:t>
             </a:r>
           </a:p>
           <a:p>
             <a:pPr lvl="1"/>
             <a:r>
-              <a:t>Q3 初新增逾 250 億美元，多為 take-or-pay 長約</a:t>
+              <a:t>共識 2026E 年底 backlog 約 1,265 億美元</a:t>
             </a:r>
           </a:p>
           <a:p>
@@ -48976,7 +50789,7 @@
           <a:p>
             <a:pPr/>
             <a:r>
-              <a:t>ARK 逢低買進約 1,340 萬美元</a:t>
+              <a:t>S&amp;P、Fitch 評等展望仍為正向</a:t>
             </a:r>
           </a:p>
         </p:txBody>
@@ -49066,7 +50879,7 @@
                   <a:prstClr val="black"/>
                 </a:solidFill>
               </a:rPr>
-              <a:t>資料來源：Bloomberg、Benzinga、CoreWeave Q2 財報；資料日期：2026/10/15。</a:t>
+              <a:t>資料來源：Bloomberg（BEst、RATC）、Benzinga、CoreWeave Q2 財報；資料日期：2026/10/16。</a:t>
             </a:r>
             <a:endParaRPr lang="zh-TW" altLang="en-US" b="1" kern="0" dirty="0">
               <a:solidFill>
@@ -49086,7 +50899,7 @@
 </p:sld>
 </file>
 
-<file path=ppt/slides/slide23.xml><?xml version="1.0" encoding="utf-8"?>
+<file path=ppt/slides/slide25.xml><?xml version="1.0" encoding="utf-8"?>
 <p:sld xmlns:a="http://schemas.openxmlformats.org/drawingml/2006/main" xmlns:p="http://schemas.openxmlformats.org/presentationml/2006/main" xmlns:r="http://schemas.openxmlformats.org/officeDocument/2006/relationships">
   <p:cSld>
     <p:spTree>
@@ -49459,7 +51272,7 @@
                             <a:srgbClr val="000000"/>
                           </a:solidFill>
                         </a:rPr>
-                        <a:t>S&amp;P／Moody's 評等</a:t>
+                        <a:t>S&amp;P、Fitch 正向展望</a:t>
                       </a:r>
                     </a:p>
                   </a:txBody>
@@ -49480,7 +51293,7 @@
                             <a:srgbClr val="000000"/>
                           </a:solidFill>
                         </a:rPr>
-                        <a:t>市場價格已低於評等，調降機率上升</a:t>
+                        <a:t>市場已定價困境，展望下修機率上升</a:t>
                       </a:r>
                     </a:p>
                   </a:txBody>
@@ -49538,7 +51351,7 @@
                   <a:prstClr val="black"/>
                 </a:solidFill>
               </a:rPr>
-              <a:t>資料來源：公司指引、Benzinga 市場預估；本報告整理；資料日期：2026/10/15。</a:t>
+              <a:t>資料來源：公司指引、Bloomberg；本報告整理；資料日期：2026/10/16。</a:t>
             </a:r>
             <a:endParaRPr lang="zh-TW" altLang="en-US" b="1" kern="0" dirty="0">
               <a:solidFill>
@@ -49558,7 +51371,7 @@
 </p:sld>
 </file>
 
-<file path=ppt/slides/slide24.xml><?xml version="1.0" encoding="utf-8"?>
+<file path=ppt/slides/slide26.xml><?xml version="1.0" encoding="utf-8"?>
 <p:sld xmlns:a="http://schemas.openxmlformats.org/drawingml/2006/main" xmlns:p="http://schemas.openxmlformats.org/presentationml/2006/main" xmlns:r="http://schemas.openxmlformats.org/officeDocument/2006/relationships">
   <p:cSld>
     <p:spTree>
@@ -49684,37 +51497,37 @@
           <a:p>
             <a:pPr/>
             <a:r>
-              <a:t>市場訊號：5Y CDS 由 368bp 升至 1,194.5bp，隱含 5 年違約機率約 60%</a:t>
+              <a:t>市場訊號：5Y CDS 1,087bp（一年前 359bp），隱含 5 年違約機率約 60%</a:t>
             </a:r>
           </a:p>
           <a:p>
             <a:pPr lvl="1"/>
             <a:r>
-              <a:t>無擔保債跌破 80 美分、殖利率逾 15%；評等仍為 B+ / Ba3</a:t>
+              <a:t>無擔保債跌破 80 美分；評等 Ba3／B+／BB-，S&amp;P 與 Fitch 仍為正向展望</a:t>
             </a:r>
           </a:p>
           <a:p>
             <a:pPr/>
             <a:r>
-              <a:t>債務：本金 356 億美元；2026 年截至 9 月新增約 277 億，為 2025 年的 2.4 倍</a:t>
+              <a:t>債務：總債務 441 億美元；2026 年截至 9 月新增約 286 億，為 2025 年的 2.4 倍</a:t>
             </a:r>
           </a:p>
           <a:p>
             <a:pPr/>
             <a:r>
-              <a:t>融資：2026 年資金大致打平但幾無緩衝；2027 年估計仍需約 280–330 億美元</a:t>
+              <a:t>償債：共識 2026E 營業利益只夠支付 35% 的利息，2027E 為 78%</a:t>
             </a:r>
           </a:p>
           <a:p>
             <a:pPr/>
             <a:r>
-              <a:t>關鍵：專案層 DDTL 仍借得到，公司層只能靠可轉債與增資，股東稀釋</a:t>
+              <a:t>融資：共識 2026E、2027E 自由現金流約 −272、−306 億美元，每年須發債逾 300 億</a:t>
             </a:r>
           </a:p>
           <a:p>
             <a:pPr/>
             <a:r>
-              <a:t>支撐：backlog 1,042 億美元、Nvidia 產能回購承諾</a:t>
+              <a:t>關鍵：專案層 DDTL 仍借得到；公司層只能靠可轉債與增資，股東稀釋</a:t>
             </a:r>
           </a:p>
         </p:txBody>
@@ -49783,7 +51596,7 @@
                   <a:prstClr val="black"/>
                 </a:solidFill>
               </a:rPr>
-              <a:t>資料來源：Bloomberg、ICE、TRACE、CoreWeave 10-Q、公司公告；本報告估算；資料日期：2026/10/15。</a:t>
+              <a:t>資料來源：Bloomberg（CDS、DDIS、RATC、BEst 共識）、CoreWeave 公司公告；資料日期：2026/10/16。</a:t>
             </a:r>
             <a:endParaRPr lang="zh-TW" altLang="en-US" b="1" kern="0" dirty="0">
               <a:solidFill>
@@ -49829,7 +51642,7 @@
           <a:lstStyle/>
           <a:p>
             <a:r>
-              <a:t>七大風險面向：市場信用與獲利能力為高風險</a:t>
+              <a:t>七大風險面向：市場信用與償債能力為高風險</a:t>
             </a:r>
           </a:p>
         </p:txBody>
@@ -49853,9 +51666,9 @@
                 <a:tableStyleId>{5C22544A-7EE6-4342-B048-85BDC9FD1C3A}</a:tableStyleId>
               </a:tblPr>
               <a:tblGrid>
-                <a:gridCol w="3110804"/>
-                <a:gridCol w="1493186"/>
-                <a:gridCol w="6719337"/>
+                <a:gridCol w="3180710"/>
+                <a:gridCol w="1526740"/>
+                <a:gridCol w="6615877"/>
               </a:tblGrid>
               <a:tr h="431800">
                 <a:tc>
@@ -49976,7 +51789,7 @@
                             <a:srgbClr val="000000"/>
                           </a:solidFill>
                         </a:rPr>
-                        <a:t>CDS 1,194.5bp，債價 &lt; 80，殖利率 &gt; 15%</a:t>
+                        <a:t>CDS 1,087bp，無擔保債價 &lt; 80，殖利率 &gt; 15%</a:t>
                       </a:r>
                     </a:p>
                   </a:txBody>
@@ -50041,7 +51854,7 @@
                             <a:srgbClr val="000000"/>
                           </a:solidFill>
                         </a:rPr>
-                        <a:t>短期可應付；資本支出缺口須持續融資</a:t>
+                        <a:t>共識 2026–27 年自由現金流合計約 −580 億美元</a:t>
                       </a:r>
                     </a:p>
                   </a:txBody>
@@ -50106,7 +51919,7 @@
                             <a:srgbClr val="000000"/>
                           </a:solidFill>
                         </a:rPr>
-                        <a:t>Q2 淨損 6.26 億美元；Q3 利息費用季增約 40%</a:t>
+                        <a:t>共識 2026E 營業利益／利息僅 0.35 倍</a:t>
                       </a:r>
                     </a:p>
                   </a:txBody>
@@ -50301,7 +52114,7 @@
                             <a:srgbClr val="000000"/>
                           </a:solidFill>
                         </a:rPr>
-                        <a:t>GPU 擔保貸款 136 億美元；貸款 5 年 vs. 合約約 3 年</a:t>
+                        <a:t>擔保貸款 233 億美元；貸款約 5 年 vs. 合約約 3 年</a:t>
                       </a:r>
                     </a:p>
                   </a:txBody>
@@ -50424,7 +52237,7 @@
                   <a:prstClr val="black"/>
                 </a:solidFill>
               </a:rPr>
-              <a:t>資料來源：Bloomberg、CNBC、CoreWeave 10-Q；本報告整理；資料日期：2026/10/15。</a:t>
+              <a:t>資料來源：Bloomberg、CoreWeave 10-Q、CNBC；本報告整理；資料日期：2026/10/16。</a:t>
             </a:r>
             <a:endParaRPr lang="zh-TW" altLang="en-US" b="1" kern="0" dirty="0">
               <a:solidFill>
@@ -50537,12 +52350,12 @@
       <p:grpSpPr/>
       <p:sp>
         <p:nvSpPr>
-          <p:cNvPr id="2" name="Content Placeholder 1"/>
+          <p:cNvPr id="3" name="Text Placeholder 2"/>
           <p:cNvSpPr>
             <a:spLocks noGrp="1"/>
           </p:cNvSpPr>
           <p:nvPr>
-            <p:ph idx="24" sz="half"/>
+            <p:ph type="body" idx="15" sz="quarter"/>
           </p:nvPr>
         </p:nvSpPr>
         <p:spPr/>
@@ -50550,76 +52363,15 @@
           <a:bodyPr/>
           <a:lstStyle/>
           <a:p>
-            <a:pPr/>
-            <a:r>
-              <a:t>1,000bp 一般視為信用困境門檻</a:t>
-            </a:r>
-          </a:p>
-          <a:p>
-            <a:pPr/>
-            <a:r>
-              <a:t>隱含年違約率 ≈ 1,194.5 ÷ (1 − 40%) ≈ 19.9%</a:t>
-            </a:r>
-          </a:p>
-          <a:p>
-            <a:pPr/>
-            <a:r>
-              <a:t>5 年累積違約機率約 63%；7 月底約 50%</a:t>
-            </a:r>
-          </a:p>
-          <a:p>
-            <a:pPr/>
-            <a:r>
-              <a:t>10/15 為盤中高點，同日黃仁勳發言後股價反彈 5.94%</a:t>
+            <a:r>
+              <a:t>10 月初約 850bp，兩週內擴大約 250bp；以回收率 40% 計，隱含 5 年違約機率約 60%</a:t>
             </a:r>
           </a:p>
         </p:txBody>
       </p:sp>
       <p:sp>
         <p:nvSpPr>
-          <p:cNvPr id="3" name="Text Placeholder 2"/>
-          <p:cNvSpPr>
-            <a:spLocks noGrp="1"/>
-          </p:cNvSpPr>
-          <p:nvPr>
-            <p:ph type="body" idx="23"/>
-          </p:nvPr>
-        </p:nvSpPr>
-        <p:spPr/>
-        <p:txBody>
-          <a:bodyPr/>
-          <a:lstStyle/>
-          <a:p>
-            <a:r>
-              <a:t>解讀</a:t>
-            </a:r>
-          </a:p>
-        </p:txBody>
-      </p:sp>
-      <p:sp>
-        <p:nvSpPr>
-          <p:cNvPr id="5" name="Text Placeholder 4"/>
-          <p:cNvSpPr>
-            <a:spLocks noGrp="1"/>
-          </p:cNvSpPr>
-          <p:nvPr>
-            <p:ph type="body" idx="1"/>
-          </p:nvPr>
-        </p:nvSpPr>
-        <p:spPr/>
-        <p:txBody>
-          <a:bodyPr/>
-          <a:lstStyle/>
-          <a:p>
-            <a:r>
-              <a:t>CoreWeave 5Y CDS（bp）</a:t>
-            </a:r>
-          </a:p>
-        </p:txBody>
-      </p:sp>
-      <p:sp>
-        <p:nvSpPr>
-          <p:cNvPr id="6" name="Title 5"/>
+          <p:cNvPr id="4" name="Title 3"/>
           <p:cNvSpPr>
             <a:spLocks noGrp="1"/>
           </p:cNvSpPr>
@@ -50633,32 +52385,38 @@
           <a:lstStyle/>
           <a:p>
             <a:r>
-              <a:t>5Y CDS 七個交易日內從 368bp 升至 1,194.5bp</a:t>
+              <a:t>5Y CDS 一年內由 359bp 升至 1,087bp，10/14 創 1,118bp 新高</a:t>
             </a:r>
           </a:p>
         </p:txBody>
       </p:sp>
-      <p:graphicFrame>
-        <p:nvGraphicFramePr>
-          <p:cNvPr id="7" name="Chart 6"/>
-          <p:cNvGraphicFramePr>
-            <a:graphicFrameLocks noGrp="1"/>
-          </p:cNvGraphicFramePr>
+      <p:pic>
+        <p:nvPicPr>
+          <p:cNvPr id="5" name="Picture 4" descr="cds_bbg.jpg"/>
+          <p:cNvPicPr>
+            <a:picLocks noChangeAspect="1"/>
+          </p:cNvPicPr>
           <p:nvPr/>
-        </p:nvGraphicFramePr>
-        <p:xfrm>
-          <a:off x="397728" y="1592263"/>
-          <a:ext cx="5617746" cy="4752975"/>
-        </p:xfrm>
-        <a:graphic>
-          <a:graphicData uri="http://schemas.openxmlformats.org/drawingml/2006/chart">
-            <c:chart xmlns:c="http://schemas.openxmlformats.org/drawingml/2006/chart" r:id="rId2"/>
-          </a:graphicData>
-        </a:graphic>
-      </p:graphicFrame>
+        </p:nvPicPr>
+        <p:blipFill>
+          <a:blip r:embed="rId2"/>
+          <a:stretch>
+            <a:fillRect/>
+          </a:stretch>
+        </p:blipFill>
+        <p:spPr>
+          <a:xfrm>
+            <a:off x="407988" y="1628775"/>
+            <a:ext cx="11323328" cy="4326031"/>
+          </a:xfrm>
+          <a:prstGeom prst="rect">
+            <a:avLst/>
+          </a:prstGeom>
+        </p:spPr>
+      </p:pic>
       <p:sp>
         <p:nvSpPr>
-          <p:cNvPr id="9" name="頁尾版面配置區 2">
+          <p:cNvPr id="7" name="頁尾版面配置區 2">
             <a:extLst>
               <a:ext uri="{FF2B5EF4-FFF2-40B4-BE49-F238E27FC236}">
                 <a16:creationId xmlns:a16="http://schemas.microsoft.com/office/drawing/2014/main" id="{D860F382-0A64-0ADD-DBCD-581BDE952DAC}"/>
@@ -50675,7 +52433,7 @@
         <p:spPr>
           <a:xfrm>
             <a:off x="333338" y="6437589"/>
-            <a:ext cx="9247542" cy="331777"/>
+            <a:ext cx="9288182" cy="331777"/>
           </a:xfrm>
           <a:prstGeom prst="rect">
             <a:avLst/>
@@ -50699,7 +52457,7 @@
                   <a:prstClr val="black"/>
                 </a:solidFill>
               </a:rPr>
-              <a:t>資料來源：ICE Data Services、Bloomberg；資料日期：2026/10/15。</a:t>
+              <a:t>資料來源：Bloomberg（CRWV CDS USD SR 5Y D14）；資料日期：2026/10/16。</a:t>
             </a:r>
             <a:endParaRPr lang="zh-TW" altLang="en-US" b="1" kern="0" dirty="0">
               <a:solidFill>
@@ -50745,7 +52503,7 @@
           <a:lstStyle/>
           <a:p>
             <a:r>
-              <a:t>債價跌破 80、殖利率逾 15%，市場定價遠低於評等</a:t>
+              <a:t>無擔保債跌破 80，S&amp;P 與 Fitch 卻仍為正向展望</a:t>
             </a:r>
           </a:p>
         </p:txBody>
@@ -50760,7 +52518,7 @@
         </p:nvGraphicFramePr>
         <p:xfrm>
           <a:off x="407988" y="1203650"/>
-          <a:ext cx="11323327" cy="3022600"/>
+          <a:ext cx="11323327" cy="3200400"/>
         </p:xfrm>
         <a:graphic>
           <a:graphicData uri="http://schemas.openxmlformats.org/drawingml/2006/table">
@@ -50769,18 +52527,18 @@
                 <a:tableStyleId>{5C22544A-7EE6-4342-B048-85BDC9FD1C3A}</a:tableStyleId>
               </a:tblPr>
               <a:tblGrid>
-                <a:gridCol w="3463606"/>
-                <a:gridCol w="3063959"/>
-                <a:gridCol w="4795762"/>
+                <a:gridCol w="3370038"/>
+                <a:gridCol w="3100435"/>
+                <a:gridCol w="4852854"/>
               </a:tblGrid>
-              <a:tr h="431800">
+              <a:tr h="355600">
                 <a:tc>
                   <a:txBody>
                     <a:bodyPr/>
                     <a:lstStyle/>
                     <a:p>
                       <a:r>
-                        <a:rPr b="1" sz="1400">
+                        <a:rPr b="1" sz="1200">
                           <a:solidFill>
                             <a:srgbClr val="FFFFFF"/>
                           </a:solidFill>
@@ -50801,7 +52559,7 @@
                     <a:lstStyle/>
                     <a:p>
                       <a:r>
-                        <a:rPr b="1" sz="1400">
+                        <a:rPr b="1" sz="1200">
                           <a:solidFill>
                             <a:srgbClr val="FFFFFF"/>
                           </a:solidFill>
@@ -50822,7 +52580,7 @@
                     <a:lstStyle/>
                     <a:p>
                       <a:r>
-                        <a:rPr b="1" sz="1400">
+                        <a:rPr b="1" sz="1200">
                           <a:solidFill>
                             <a:srgbClr val="FFFFFF"/>
                           </a:solidFill>
@@ -50838,14 +52596,14 @@
                   </a:tcPr>
                 </a:tc>
               </a:tr>
-              <a:tr h="431800">
+              <a:tr h="355600">
                 <a:tc>
                   <a:txBody>
                     <a:bodyPr/>
                     <a:lstStyle/>
                     <a:p>
                       <a:r>
-                        <a:rPr sz="1400">
+                        <a:rPr sz="1200">
                           <a:solidFill>
                             <a:srgbClr val="000000"/>
                           </a:solidFill>
@@ -50866,12 +52624,12 @@
                     <a:lstStyle/>
                     <a:p>
                       <a:r>
-                        <a:rPr sz="1400">
+                        <a:rPr sz="1200">
                           <a:solidFill>
                             <a:srgbClr val="000000"/>
                           </a:solidFill>
                         </a:rPr>
-                        <a:t>1,194.5bp</a:t>
+                        <a:t>1,086.8bp</a:t>
                       </a:r>
                     </a:p>
                   </a:txBody>
@@ -50887,12 +52645,12 @@
                     <a:lstStyle/>
                     <a:p>
                       <a:r>
-                        <a:rPr sz="1400">
+                        <a:rPr sz="1200">
                           <a:solidFill>
                             <a:srgbClr val="000000"/>
                           </a:solidFill>
                         </a:rPr>
-                        <a:t>10/15 盤中歷史新高</a:t>
+                        <a:t>10/14 高點 1,117.8bp</a:t>
                       </a:r>
                     </a:p>
                   </a:txBody>
@@ -50903,14 +52661,14 @@
                   </a:tcPr>
                 </a:tc>
               </a:tr>
-              <a:tr h="431800">
+              <a:tr h="355600">
                 <a:tc>
                   <a:txBody>
                     <a:bodyPr/>
                     <a:lstStyle/>
                     <a:p>
                       <a:r>
-                        <a:rPr sz="1400">
+                        <a:rPr sz="1200">
                           <a:solidFill>
                             <a:srgbClr val="000000"/>
                           </a:solidFill>
@@ -50931,12 +52689,12 @@
                     <a:lstStyle/>
                     <a:p>
                       <a:r>
-                        <a:rPr sz="1400">
+                        <a:rPr sz="1200">
                           <a:solidFill>
                             <a:srgbClr val="000000"/>
                           </a:solidFill>
                         </a:rPr>
-                        <a:t>79.9 / 殖利率 15.6%</a:t>
+                        <a:t>79.9／殖利率 15.6%</a:t>
                       </a:r>
                     </a:p>
                   </a:txBody>
@@ -50952,12 +52710,12 @@
                     <a:lstStyle/>
                     <a:p>
                       <a:r>
-                        <a:rPr sz="1400">
+                        <a:rPr sz="1200">
                           <a:solidFill>
                             <a:srgbClr val="000000"/>
                           </a:solidFill>
                         </a:rPr>
-                        <a:t>10/14 單日跌 3.3 美分</a:t>
+                        <a:t>TRACE 10/14（媒體報導）</a:t>
                       </a:r>
                     </a:p>
                   </a:txBody>
@@ -50968,19 +52726,19 @@
                   </a:tcPr>
                 </a:tc>
               </a:tr>
-              <a:tr h="431800">
+              <a:tr h="355600">
                 <a:tc>
                   <a:txBody>
                     <a:bodyPr/>
                     <a:lstStyle/>
                     <a:p>
                       <a:r>
-                        <a:rPr sz="1400">
+                        <a:rPr sz="1200">
                           <a:solidFill>
                             <a:srgbClr val="000000"/>
                           </a:solidFill>
                         </a:rPr>
-                        <a:t>2031 年 9.75% 無擔保債</a:t>
+                        <a:t>2031 年 1.75% 可轉債</a:t>
                       </a:r>
                     </a:p>
                   </a:txBody>
@@ -50996,12 +52754,12 @@
                     <a:lstStyle/>
                     <a:p>
                       <a:r>
-                        <a:rPr sz="1400">
+                        <a:rPr sz="1200">
                           <a:solidFill>
                             <a:srgbClr val="000000"/>
                           </a:solidFill>
                         </a:rPr>
-                        <a:t>約 78.65</a:t>
+                        <a:t>81.37／殖利率 6.04%</a:t>
                       </a:r>
                     </a:p>
                   </a:txBody>
@@ -51017,12 +52775,12 @@
                     <a:lstStyle/>
                     <a:p>
                       <a:r>
-                        <a:rPr sz="1400">
+                        <a:rPr sz="1200">
                           <a:solidFill>
                             <a:srgbClr val="000000"/>
                           </a:solidFill>
                         </a:rPr>
-                        <a:t>單日跌約 2.6 美分</a:t>
+                        <a:t>利差 115bp</a:t>
                       </a:r>
                     </a:p>
                   </a:txBody>
@@ -51033,19 +52791,19 @@
                   </a:tcPr>
                 </a:tc>
               </a:tr>
-              <a:tr h="431800">
+              <a:tr h="355600">
                 <a:tc>
                   <a:txBody>
                     <a:bodyPr/>
                     <a:lstStyle/>
                     <a:p>
                       <a:r>
-                        <a:rPr sz="1400">
+                        <a:rPr sz="1200">
                           <a:solidFill>
                             <a:srgbClr val="000000"/>
                           </a:solidFill>
                         </a:rPr>
-                        <a:t>股價</a:t>
+                        <a:t>2032 年 1.75% 可轉債</a:t>
                       </a:r>
                     </a:p>
                   </a:txBody>
@@ -51061,12 +52819,12 @@
                     <a:lstStyle/>
                     <a:p>
                       <a:r>
-                        <a:rPr sz="1400">
+                        <a:rPr sz="1200">
                           <a:solidFill>
                             <a:srgbClr val="000000"/>
                           </a:solidFill>
                         </a:rPr>
-                        <a:t>10/14 收 65.78 美元</a:t>
+                        <a:t>77.11／殖利率 6.44%</a:t>
                       </a:r>
                     </a:p>
                   </a:txBody>
@@ -51082,12 +52840,12 @@
                     <a:lstStyle/>
                     <a:p>
                       <a:r>
-                        <a:rPr sz="1400">
+                        <a:rPr sz="1200">
                           <a:solidFill>
                             <a:srgbClr val="000000"/>
                           </a:solidFill>
                         </a:rPr>
-                        <a:t>四個交易日市值蒸發逾 100 億美元</a:t>
+                        <a:t>利差 155bp</a:t>
                       </a:r>
                     </a:p>
                   </a:txBody>
@@ -51098,19 +52856,19 @@
                   </a:tcPr>
                 </a:tc>
               </a:tr>
-              <a:tr h="431800">
+              <a:tr h="355600">
                 <a:tc>
                   <a:txBody>
                     <a:bodyPr/>
                     <a:lstStyle/>
                     <a:p>
                       <a:r>
-                        <a:rPr sz="1400">
+                        <a:rPr sz="1200">
                           <a:solidFill>
                             <a:srgbClr val="000000"/>
                           </a:solidFill>
                         </a:rPr>
-                        <a:t>S&amp;P / Moody's 評等</a:t>
+                        <a:t>2033 年 2.875% 可轉債</a:t>
                       </a:r>
                     </a:p>
                   </a:txBody>
@@ -51126,12 +52884,12 @@
                     <a:lstStyle/>
                     <a:p>
                       <a:r>
-                        <a:rPr sz="1400">
+                        <a:rPr sz="1200">
                           <a:solidFill>
                             <a:srgbClr val="000000"/>
                           </a:solidFill>
                         </a:rPr>
-                        <a:t>B+ / Ba3</a:t>
+                        <a:t>89.73／殖利率 4.74%</a:t>
                       </a:r>
                     </a:p>
                   </a:txBody>
@@ -51147,12 +52905,12 @@
                     <a:lstStyle/>
                     <a:p>
                       <a:r>
-                        <a:rPr sz="1400">
+                        <a:rPr sz="1200">
                           <a:solidFill>
                             <a:srgbClr val="000000"/>
                           </a:solidFill>
                         </a:rPr>
-                        <a:t>投機級但非困境；待核對</a:t>
+                        <a:t>9 月以面額發行，一個月跌約 10 點</a:t>
                       </a:r>
                     </a:p>
                   </a:txBody>
@@ -51163,19 +52921,19 @@
                   </a:tcPr>
                 </a:tc>
               </a:tr>
-              <a:tr h="431800">
+              <a:tr h="355600">
                 <a:tc>
                   <a:txBody>
                     <a:bodyPr/>
                     <a:lstStyle/>
                     <a:p>
                       <a:r>
-                        <a:rPr sz="1400">
+                        <a:rPr sz="1200">
                           <a:solidFill>
                             <a:srgbClr val="000000"/>
                           </a:solidFill>
                         </a:rPr>
-                        <a:t>可轉債轉換價</a:t>
+                        <a:t>Moody's</a:t>
                       </a:r>
                     </a:p>
                   </a:txBody>
@@ -51191,12 +52949,12 @@
                     <a:lstStyle/>
                     <a:p>
                       <a:r>
-                        <a:rPr sz="1400">
+                        <a:rPr sz="1200">
                           <a:solidFill>
                             <a:srgbClr val="000000"/>
                           </a:solidFill>
                         </a:rPr>
-                        <a:t>約 97.85 美元</a:t>
+                        <a:t>Ba3（穩定）</a:t>
                       </a:r>
                     </a:p>
                   </a:txBody>
@@ -51212,12 +52970,142 @@
                     <a:lstStyle/>
                     <a:p>
                       <a:r>
-                        <a:rPr sz="1400">
+                        <a:rPr sz="1200">
                           <a:solidFill>
                             <a:srgbClr val="000000"/>
                           </a:solidFill>
                         </a:rPr>
-                        <a:t>股價遠低於此，可轉債實質為純債務</a:t>
+                        <a:t>無擔保債 B1；流動性 SGL-3</a:t>
+                      </a:r>
+                    </a:p>
+                  </a:txBody>
+                  <a:tcPr anchor="ctr">
+                    <a:solidFill>
+                      <a:srgbClr val="F2F5FA"/>
+                    </a:solidFill>
+                  </a:tcPr>
+                </a:tc>
+              </a:tr>
+              <a:tr h="355600">
+                <a:tc>
+                  <a:txBody>
+                    <a:bodyPr/>
+                    <a:lstStyle/>
+                    <a:p>
+                      <a:r>
+                        <a:rPr sz="1200">
+                          <a:solidFill>
+                            <a:srgbClr val="000000"/>
+                          </a:solidFill>
+                        </a:rPr>
+                        <a:t>S&amp;P</a:t>
+                      </a:r>
+                    </a:p>
+                  </a:txBody>
+                  <a:tcPr anchor="ctr">
+                    <a:solidFill>
+                      <a:srgbClr val="FFFFFF"/>
+                    </a:solidFill>
+                  </a:tcPr>
+                </a:tc>
+                <a:tc>
+                  <a:txBody>
+                    <a:bodyPr/>
+                    <a:lstStyle/>
+                    <a:p>
+                      <a:r>
+                        <a:rPr sz="1200">
+                          <a:solidFill>
+                            <a:srgbClr val="000000"/>
+                          </a:solidFill>
+                        </a:rPr>
+                        <a:t>B+（正向）</a:t>
+                      </a:r>
+                    </a:p>
+                  </a:txBody>
+                  <a:tcPr anchor="ctr">
+                    <a:solidFill>
+                      <a:srgbClr val="FFFFFF"/>
+                    </a:solidFill>
+                  </a:tcPr>
+                </a:tc>
+                <a:tc>
+                  <a:txBody>
+                    <a:bodyPr/>
+                    <a:lstStyle/>
+                    <a:p>
+                      <a:r>
+                        <a:rPr sz="1200">
+                          <a:solidFill>
+                            <a:srgbClr val="000000"/>
+                          </a:solidFill>
+                        </a:rPr>
+                        <a:t>展望 2026/4/9 調為正向</a:t>
+                      </a:r>
+                    </a:p>
+                  </a:txBody>
+                  <a:tcPr anchor="ctr">
+                    <a:solidFill>
+                      <a:srgbClr val="FFFFFF"/>
+                    </a:solidFill>
+                  </a:tcPr>
+                </a:tc>
+              </a:tr>
+              <a:tr h="355600">
+                <a:tc>
+                  <a:txBody>
+                    <a:bodyPr/>
+                    <a:lstStyle/>
+                    <a:p>
+                      <a:r>
+                        <a:rPr sz="1200">
+                          <a:solidFill>
+                            <a:srgbClr val="000000"/>
+                          </a:solidFill>
+                        </a:rPr>
+                        <a:t>Fitch</a:t>
+                      </a:r>
+                    </a:p>
+                  </a:txBody>
+                  <a:tcPr anchor="ctr">
+                    <a:solidFill>
+                      <a:srgbClr val="F2F5FA"/>
+                    </a:solidFill>
+                  </a:tcPr>
+                </a:tc>
+                <a:tc>
+                  <a:txBody>
+                    <a:bodyPr/>
+                    <a:lstStyle/>
+                    <a:p>
+                      <a:r>
+                        <a:rPr sz="1200">
+                          <a:solidFill>
+                            <a:srgbClr val="000000"/>
+                          </a:solidFill>
+                        </a:rPr>
+                        <a:t>BB-（正向）</a:t>
+                      </a:r>
+                    </a:p>
+                  </a:txBody>
+                  <a:tcPr anchor="ctr">
+                    <a:solidFill>
+                      <a:srgbClr val="F2F5FA"/>
+                    </a:solidFill>
+                  </a:tcPr>
+                </a:tc>
+                <a:tc>
+                  <a:txBody>
+                    <a:bodyPr/>
+                    <a:lstStyle/>
+                    <a:p>
+                      <a:r>
+                        <a:rPr sz="1200">
+                          <a:solidFill>
+                            <a:srgbClr val="000000"/>
+                          </a:solidFill>
+                        </a:rPr>
+                        <a:t>2026/7/16 確認</a:t>
                       </a:r>
                     </a:p>
                   </a:txBody>
@@ -51275,7 +53163,7 @@
                   <a:prstClr val="black"/>
                 </a:solidFill>
               </a:rPr>
-              <a:t>資料來源：TRACE、ICE、Bloomberg、CNBC；資料日期：2026/10/15。</a:t>
+              <a:t>資料來源：Bloomberg（YAS、RATC）、TRACE；資料日期：2026/10/16。</a:t>
             </a:r>
             <a:endParaRPr lang="zh-TW" altLang="en-US" b="1" kern="0" dirty="0">
               <a:solidFill>
